--- a/ADG/_실측판/11장/11장_SnapshotStandby.pptx
+++ b/ADG/_실측판/11장/11장_SnapshotStandby.pptx
@@ -5828,7 +5828,17 @@
                 </a:solidFill>
                 <a:latin typeface="맑은 고딕"/>
               </a:rPr>
-              <a:t>•  전환 전 boston — `FLASHBACK_ON = NO`</a:t>
+              <a:t>•  전환 전 boston — </a:t>
+            </a:r>
+            <a:r>
+              <a:rPr sz="1700" b="0">
+                <a:solidFill>
+                  <a:srgbClr val="222222"/>
+                </a:solidFill>
+                <a:latin typeface="Consolas"/>
+                <a:cs typeface="Consolas"/>
+              </a:rPr>
+              <a:t>FLASHBACK_ON = NO</a:t>
             </a:r>
           </a:p>
           <a:p>
@@ -5844,7 +5854,17 @@
                 </a:solidFill>
                 <a:latin typeface="맑은 고딕"/>
               </a:rPr>
-              <a:t>•  Primary 도 `NO`</a:t>
+              <a:t>•  Primary 도 </a:t>
+            </a:r>
+            <a:r>
+              <a:rPr sz="1700" b="0">
+                <a:solidFill>
+                  <a:srgbClr val="222222"/>
+                </a:solidFill>
+                <a:latin typeface="Consolas"/>
+                <a:cs typeface="Consolas"/>
+              </a:rPr>
+              <a:t>NO</a:t>
             </a:r>
           </a:p>
           <a:p>
@@ -5876,7 +5896,25 @@
                 </a:solidFill>
                 <a:latin typeface="맑은 고딕"/>
               </a:rPr>
-              <a:t>•  이유 — 전체 플래시백 로깅이 아니라 **보장 복원 지점**을 쓴다</a:t>
+              <a:t>•  이유 — 전체 플래시백 로깅이 아니라 </a:t>
+            </a:r>
+            <a:r>
+              <a:rPr sz="1700" b="1">
+                <a:solidFill>
+                  <a:srgbClr val="222222"/>
+                </a:solidFill>
+                <a:latin typeface="맑은 고딕"/>
+              </a:rPr>
+              <a:t>보장 복원 지점</a:t>
+            </a:r>
+            <a:r>
+              <a:rPr sz="1700" b="0">
+                <a:solidFill>
+                  <a:srgbClr val="222222"/>
+                </a:solidFill>
+                <a:latin typeface="맑은 고딕"/>
+              </a:rPr>
+              <a:t>을 쓴다</a:t>
             </a:r>
           </a:p>
         </p:txBody>
@@ -6055,7 +6093,25 @@
                 </a:solidFill>
                 <a:latin typeface="맑은 고딕"/>
               </a:rPr>
-              <a:t>•  **① FRA 여유** — 실습 15,360MB 중 1,536MB 사용</a:t>
+              <a:t>•  </a:t>
+            </a:r>
+            <a:r>
+              <a:rPr sz="1700" b="1">
+                <a:solidFill>
+                  <a:srgbClr val="222222"/>
+                </a:solidFill>
+                <a:latin typeface="맑은 고딕"/>
+              </a:rPr>
+              <a:t>① FRA 여유</a:t>
+            </a:r>
+            <a:r>
+              <a:rPr sz="1700" b="0">
+                <a:solidFill>
+                  <a:srgbClr val="222222"/>
+                </a:solidFill>
+                <a:latin typeface="맑은 고딕"/>
+              </a:rPr>
+              <a:t> — 실습 15,360MB 중 1,536MB 사용</a:t>
             </a:r>
           </a:p>
           <a:p>
@@ -6071,7 +6127,25 @@
                 </a:solidFill>
                 <a:latin typeface="맑은 고딕"/>
               </a:rPr>
-              <a:t>•  **② 다른 Standby 가 있는가** — 전환하면 재해 복구 대상이 아니다</a:t>
+              <a:t>•  </a:t>
+            </a:r>
+            <a:r>
+              <a:rPr sz="1700" b="1">
+                <a:solidFill>
+                  <a:srgbClr val="222222"/>
+                </a:solidFill>
+                <a:latin typeface="맑은 고딕"/>
+              </a:rPr>
+              <a:t>② 다른 Standby 가 있는가</a:t>
+            </a:r>
+            <a:r>
+              <a:rPr sz="1700" b="0">
+                <a:solidFill>
+                  <a:srgbClr val="222222"/>
+                </a:solidFill>
+                <a:latin typeface="맑은 고딕"/>
+              </a:rPr>
+              <a:t> — 전환하면 재해 복구 대상이 아니다</a:t>
             </a:r>
           </a:p>
           <a:p>
@@ -6087,7 +6161,25 @@
                 </a:solidFill>
                 <a:latin typeface="맑은 고딕"/>
               </a:rPr>
-              <a:t>•  **③ 언제까지 쓸 것인가** — 길수록 리두가 쌓인다</a:t>
+              <a:t>•  </a:t>
+            </a:r>
+            <a:r>
+              <a:rPr sz="1700" b="1">
+                <a:solidFill>
+                  <a:srgbClr val="222222"/>
+                </a:solidFill>
+                <a:latin typeface="맑은 고딕"/>
+              </a:rPr>
+              <a:t>③ 언제까지 쓸 것인가</a:t>
+            </a:r>
+            <a:r>
+              <a:rPr sz="1700" b="0">
+                <a:solidFill>
+                  <a:srgbClr val="222222"/>
+                </a:solidFill>
+                <a:latin typeface="맑은 고딕"/>
+              </a:rPr>
+              <a:t> — 길수록 리두가 쌓인다</a:t>
             </a:r>
           </a:p>
           <a:p>
@@ -6103,7 +6195,25 @@
                 </a:solidFill>
                 <a:latin typeface="맑은 고딕"/>
               </a:rPr>
-              <a:t>•  **④ 남길 것은 무엇인가** — 되돌리면 전부 사라진다</a:t>
+              <a:t>•  </a:t>
+            </a:r>
+            <a:r>
+              <a:rPr sz="1700" b="1">
+                <a:solidFill>
+                  <a:srgbClr val="222222"/>
+                </a:solidFill>
+                <a:latin typeface="맑은 고딕"/>
+              </a:rPr>
+              <a:t>④ 남길 것은 무엇인가</a:t>
+            </a:r>
+            <a:r>
+              <a:rPr sz="1700" b="0">
+                <a:solidFill>
+                  <a:srgbClr val="222222"/>
+                </a:solidFill>
+                <a:latin typeface="맑은 고딕"/>
+              </a:rPr>
+              <a:t> — 되돌리면 전부 사라진다</a:t>
             </a:r>
           </a:p>
           <a:p>
@@ -6119,7 +6229,25 @@
                 </a:solidFill>
                 <a:latin typeface="맑은 고딕"/>
               </a:rPr>
-              <a:t>•  **⑤ 알림은 했는가** — ADG 조회 사용자가 있다면</a:t>
+              <a:t>•  </a:t>
+            </a:r>
+            <a:r>
+              <a:rPr sz="1700" b="1">
+                <a:solidFill>
+                  <a:srgbClr val="222222"/>
+                </a:solidFill>
+                <a:latin typeface="맑은 고딕"/>
+              </a:rPr>
+              <a:t>⑤ 알림은 했는가</a:t>
+            </a:r>
+            <a:r>
+              <a:rPr sz="1700" b="0">
+                <a:solidFill>
+                  <a:srgbClr val="222222"/>
+                </a:solidFill>
+                <a:latin typeface="맑은 고딕"/>
+              </a:rPr>
+              <a:t> — ADG 조회 사용자가 있다면</a:t>
             </a:r>
           </a:p>
         </p:txBody>
@@ -6569,7 +6697,17 @@
                 </a:solidFill>
                 <a:latin typeface="맑은 고딕"/>
               </a:rPr>
-              <a:t>•  `ORA-38784: Cannot create restore point 'SNAPSHOT_STANDBY_REQUIRED_...'`</a:t>
+              <a:t>•  </a:t>
+            </a:r>
+            <a:r>
+              <a:rPr sz="1700" b="0">
+                <a:solidFill>
+                  <a:srgbClr val="222222"/>
+                </a:solidFill>
+                <a:latin typeface="Consolas"/>
+                <a:cs typeface="Consolas"/>
+              </a:rPr>
+              <a:t>ORA-38784: Cannot create restore point 'SNAPSHOT_STANDBY_REQUIRED_...'</a:t>
             </a:r>
           </a:p>
           <a:p>
@@ -6585,7 +6723,17 @@
                 </a:solidFill>
                 <a:latin typeface="맑은 고딕"/>
               </a:rPr>
-              <a:t>•  `ORA-01153: an incompatible media recovery is active`</a:t>
+              <a:t>•  </a:t>
+            </a:r>
+            <a:r>
+              <a:rPr sz="1700" b="0">
+                <a:solidFill>
+                  <a:srgbClr val="222222"/>
+                </a:solidFill>
+                <a:latin typeface="Consolas"/>
+                <a:cs typeface="Consolas"/>
+              </a:rPr>
+              <a:t>ORA-01153: an incompatible media recovery is active</a:t>
             </a:r>
           </a:p>
           <a:p>
@@ -6601,7 +6749,16 @@
                 </a:solidFill>
                 <a:latin typeface="맑은 고딕"/>
               </a:rPr>
-              <a:t>•  읽어 낼 수 있는 것 — **전환의 첫 단계가 복원 지점 생성**</a:t>
+              <a:t>•  읽어 낼 수 있는 것 — </a:t>
+            </a:r>
+            <a:r>
+              <a:rPr sz="1700" b="1">
+                <a:solidFill>
+                  <a:srgbClr val="222222"/>
+                </a:solidFill>
+                <a:latin typeface="맑은 고딕"/>
+              </a:rPr>
+              <a:t>전환의 첫 단계가 복원 지점 생성</a:t>
             </a:r>
           </a:p>
           <a:p>
@@ -6617,7 +6774,25 @@
                 </a:solidFill>
                 <a:latin typeface="맑은 고딕"/>
               </a:rPr>
-              <a:t>•  복원 지점은 **SCN 이 고정**되어야 만들 수 있다</a:t>
+              <a:t>•  복원 지점은 </a:t>
+            </a:r>
+            <a:r>
+              <a:rPr sz="1700" b="1">
+                <a:solidFill>
+                  <a:srgbClr val="222222"/>
+                </a:solidFill>
+                <a:latin typeface="맑은 고딕"/>
+              </a:rPr>
+              <a:t>SCN 이 고정</a:t>
+            </a:r>
+            <a:r>
+              <a:rPr sz="1700" b="0">
+                <a:solidFill>
+                  <a:srgbClr val="222222"/>
+                </a:solidFill>
+                <a:latin typeface="맑은 고딕"/>
+              </a:rPr>
+              <a:t>되어야 만들 수 있다</a:t>
             </a:r>
           </a:p>
         </p:txBody>
@@ -6796,7 +6971,35 @@
                 </a:solidFill>
                 <a:latin typeface="맑은 고딕"/>
               </a:rPr>
-              <a:t>•  `DATABASE_ROLE` — PHYSICAL STANDBY → **SNAPSHOT STANDBY**</a:t>
+              <a:t>•  </a:t>
+            </a:r>
+            <a:r>
+              <a:rPr sz="1700" b="0">
+                <a:solidFill>
+                  <a:srgbClr val="222222"/>
+                </a:solidFill>
+                <a:latin typeface="Consolas"/>
+                <a:cs typeface="Consolas"/>
+              </a:rPr>
+              <a:t>DATABASE_ROLE</a:t>
+            </a:r>
+            <a:r>
+              <a:rPr sz="1700" b="0">
+                <a:solidFill>
+                  <a:srgbClr val="222222"/>
+                </a:solidFill>
+                <a:latin typeface="맑은 고딕"/>
+              </a:rPr>
+              <a:t> — PHYSICAL STANDBY → </a:t>
+            </a:r>
+            <a:r>
+              <a:rPr sz="1700" b="1">
+                <a:solidFill>
+                  <a:srgbClr val="222222"/>
+                </a:solidFill>
+                <a:latin typeface="맑은 고딕"/>
+              </a:rPr>
+              <a:t>SNAPSHOT STANDBY</a:t>
             </a:r>
           </a:p>
           <a:p>
@@ -6812,7 +7015,35 @@
                 </a:solidFill>
                 <a:latin typeface="맑은 고딕"/>
               </a:rPr>
-              <a:t>•  `CONTROLFILE_TYPE` — STANDBY → **CURRENT**</a:t>
+              <a:t>•  </a:t>
+            </a:r>
+            <a:r>
+              <a:rPr sz="1700" b="0">
+                <a:solidFill>
+                  <a:srgbClr val="222222"/>
+                </a:solidFill>
+                <a:latin typeface="Consolas"/>
+                <a:cs typeface="Consolas"/>
+              </a:rPr>
+              <a:t>CONTROLFILE_TYPE</a:t>
+            </a:r>
+            <a:r>
+              <a:rPr sz="1700" b="0">
+                <a:solidFill>
+                  <a:srgbClr val="222222"/>
+                </a:solidFill>
+                <a:latin typeface="맑은 고딕"/>
+              </a:rPr>
+              <a:t> — STANDBY → </a:t>
+            </a:r>
+            <a:r>
+              <a:rPr sz="1700" b="1">
+                <a:solidFill>
+                  <a:srgbClr val="222222"/>
+                </a:solidFill>
+                <a:latin typeface="맑은 고딕"/>
+              </a:rPr>
+              <a:t>CURRENT</a:t>
             </a:r>
           </a:p>
           <a:p>
@@ -6828,7 +7059,35 @@
                 </a:solidFill>
                 <a:latin typeface="맑은 고딕"/>
               </a:rPr>
-              <a:t>•  `FLASHBACK_ON` — NO → **RESTORE POINT ONLY**</a:t>
+              <a:t>•  </a:t>
+            </a:r>
+            <a:r>
+              <a:rPr sz="1700" b="0">
+                <a:solidFill>
+                  <a:srgbClr val="222222"/>
+                </a:solidFill>
+                <a:latin typeface="Consolas"/>
+                <a:cs typeface="Consolas"/>
+              </a:rPr>
+              <a:t>FLASHBACK_ON</a:t>
+            </a:r>
+            <a:r>
+              <a:rPr sz="1700" b="0">
+                <a:solidFill>
+                  <a:srgbClr val="222222"/>
+                </a:solidFill>
+                <a:latin typeface="맑은 고딕"/>
+              </a:rPr>
+              <a:t> — NO → </a:t>
+            </a:r>
+            <a:r>
+              <a:rPr sz="1700" b="1">
+                <a:solidFill>
+                  <a:srgbClr val="222222"/>
+                </a:solidFill>
+                <a:latin typeface="맑은 고딕"/>
+              </a:rPr>
+              <a:t>RESTORE POINT ONLY</a:t>
             </a:r>
           </a:p>
           <a:p>
@@ -6844,7 +7103,35 @@
                 </a:solidFill>
                 <a:latin typeface="맑은 고딕"/>
               </a:rPr>
-              <a:t>•  `OPEN_MODE` — READ ONLY → **MOUNTED**</a:t>
+              <a:t>•  </a:t>
+            </a:r>
+            <a:r>
+              <a:rPr sz="1700" b="0">
+                <a:solidFill>
+                  <a:srgbClr val="222222"/>
+                </a:solidFill>
+                <a:latin typeface="Consolas"/>
+                <a:cs typeface="Consolas"/>
+              </a:rPr>
+              <a:t>OPEN_MODE</a:t>
+            </a:r>
+            <a:r>
+              <a:rPr sz="1700" b="0">
+                <a:solidFill>
+                  <a:srgbClr val="222222"/>
+                </a:solidFill>
+                <a:latin typeface="맑은 고딕"/>
+              </a:rPr>
+              <a:t> — READ ONLY → </a:t>
+            </a:r>
+            <a:r>
+              <a:rPr sz="1700" b="1">
+                <a:solidFill>
+                  <a:srgbClr val="222222"/>
+                </a:solidFill>
+                <a:latin typeface="맑은 고딕"/>
+              </a:rPr>
+              <a:t>MOUNTED</a:t>
             </a:r>
           </a:p>
           <a:p>
@@ -7039,7 +7326,17 @@
                 </a:solidFill>
                 <a:latin typeface="맑은 고딕"/>
               </a:rPr>
-              <a:t>•  이름 — `SNAPSHOT_STANDBY_REQUIRED_08/27/2026 16:16:43`</a:t>
+              <a:t>•  이름 — </a:t>
+            </a:r>
+            <a:r>
+              <a:rPr sz="1700" b="0">
+                <a:solidFill>
+                  <a:srgbClr val="222222"/>
+                </a:solidFill>
+                <a:latin typeface="Consolas"/>
+                <a:cs typeface="Consolas"/>
+              </a:rPr>
+              <a:t>SNAPSHOT_STANDBY_REQUIRED_08/27/2026 16:16:43</a:t>
             </a:r>
           </a:p>
           <a:p>
@@ -7071,7 +7368,35 @@
                 </a:solidFill>
                 <a:latin typeface="맑은 고딕"/>
               </a:rPr>
-              <a:t>•  `GUARANTEE_FLASHBACK_DATABASE` — **YES**</a:t>
+              <a:t>•  </a:t>
+            </a:r>
+            <a:r>
+              <a:rPr sz="1700" b="0">
+                <a:solidFill>
+                  <a:srgbClr val="222222"/>
+                </a:solidFill>
+                <a:latin typeface="Consolas"/>
+                <a:cs typeface="Consolas"/>
+              </a:rPr>
+              <a:t>GUARANTEE_FLASHBACK_DATABASE</a:t>
+            </a:r>
+            <a:r>
+              <a:rPr sz="1700" b="0">
+                <a:solidFill>
+                  <a:srgbClr val="222222"/>
+                </a:solidFill>
+                <a:latin typeface="맑은 고딕"/>
+              </a:rPr>
+              <a:t> — </a:t>
+            </a:r>
+            <a:r>
+              <a:rPr sz="1700" b="1">
+                <a:solidFill>
+                  <a:srgbClr val="222222"/>
+                </a:solidFill>
+                <a:latin typeface="맑은 고딕"/>
+              </a:rPr>
+              <a:t>YES</a:t>
             </a:r>
           </a:p>
           <a:p>
@@ -7087,7 +7412,26 @@
                 </a:solidFill>
                 <a:latin typeface="맑은 고딕"/>
               </a:rPr>
-              <a:t>•  `STORAGE_SIZE` — 200MB</a:t>
+              <a:t>•  </a:t>
+            </a:r>
+            <a:r>
+              <a:rPr sz="1700" b="0">
+                <a:solidFill>
+                  <a:srgbClr val="222222"/>
+                </a:solidFill>
+                <a:latin typeface="Consolas"/>
+                <a:cs typeface="Consolas"/>
+              </a:rPr>
+              <a:t>STORAGE_SIZE</a:t>
+            </a:r>
+            <a:r>
+              <a:rPr sz="1700" b="0">
+                <a:solidFill>
+                  <a:srgbClr val="222222"/>
+                </a:solidFill>
+                <a:latin typeface="맑은 고딕"/>
+              </a:rPr>
+              <a:t> — 200MB</a:t>
             </a:r>
           </a:p>
           <a:p>
@@ -7103,7 +7447,25 @@
                 </a:solidFill>
                 <a:latin typeface="맑은 고딕"/>
               </a:rPr>
-              <a:t>•  **REQUIRED** 는 지우면 안 된다는 표시</a:t>
+              <a:t>•  </a:t>
+            </a:r>
+            <a:r>
+              <a:rPr sz="1700" b="1">
+                <a:solidFill>
+                  <a:srgbClr val="222222"/>
+                </a:solidFill>
+                <a:latin typeface="맑은 고딕"/>
+              </a:rPr>
+              <a:t>REQUIRED</a:t>
+            </a:r>
+            <a:r>
+              <a:rPr sz="1700" b="0">
+                <a:solidFill>
+                  <a:srgbClr val="222222"/>
+                </a:solidFill>
+                <a:latin typeface="맑은 고딕"/>
+              </a:rPr>
+              <a:t> 는 지우면 안 된다는 표시</a:t>
             </a:r>
           </a:p>
         </p:txBody>
@@ -7282,7 +7644,44 @@
                 </a:solidFill>
                 <a:latin typeface="맑은 고딕"/>
               </a:rPr>
-              <a:t>•  `ALTER DATABASE OPEN` → **READ WRITE** (READ ONLY 가 아니다)</a:t>
+              <a:t>•  </a:t>
+            </a:r>
+            <a:r>
+              <a:rPr sz="1700" b="0">
+                <a:solidFill>
+                  <a:srgbClr val="222222"/>
+                </a:solidFill>
+                <a:latin typeface="Consolas"/>
+                <a:cs typeface="Consolas"/>
+              </a:rPr>
+              <a:t>ALTER DATABASE OPEN</a:t>
+            </a:r>
+            <a:r>
+              <a:rPr sz="1700" b="0">
+                <a:solidFill>
+                  <a:srgbClr val="222222"/>
+                </a:solidFill>
+                <a:latin typeface="맑은 고딕"/>
+              </a:rPr>
+              <a:t> → </a:t>
+            </a:r>
+            <a:r>
+              <a:rPr sz="1700" b="1">
+                <a:solidFill>
+                  <a:srgbClr val="222222"/>
+                </a:solidFill>
+                <a:latin typeface="맑은 고딕"/>
+              </a:rPr>
+              <a:t>READ WRITE</a:t>
+            </a:r>
+            <a:r>
+              <a:rPr sz="1700" b="0">
+                <a:solidFill>
+                  <a:srgbClr val="222222"/>
+                </a:solidFill>
+                <a:latin typeface="맑은 고딕"/>
+              </a:rPr>
+              <a:t> (READ ONLY 가 아니다)</a:t>
             </a:r>
           </a:p>
           <a:p>
@@ -7298,7 +7697,44 @@
                 </a:solidFill>
                 <a:latin typeface="맑은 고딕"/>
               </a:rPr>
-              <a:t>•  `V$PDBS` — CHICAGO_PDB1 이 **MOUNTED** 로 남는다</a:t>
+              <a:t>•  </a:t>
+            </a:r>
+            <a:r>
+              <a:rPr sz="1700" b="0">
+                <a:solidFill>
+                  <a:srgbClr val="222222"/>
+                </a:solidFill>
+                <a:latin typeface="Consolas"/>
+                <a:cs typeface="Consolas"/>
+              </a:rPr>
+              <a:t>V$PDBS</a:t>
+            </a:r>
+            <a:r>
+              <a:rPr sz="1700" b="0">
+                <a:solidFill>
+                  <a:srgbClr val="222222"/>
+                </a:solidFill>
+                <a:latin typeface="맑은 고딕"/>
+              </a:rPr>
+              <a:t> — CHICAGO_PDB1 이 </a:t>
+            </a:r>
+            <a:r>
+              <a:rPr sz="1700" b="1">
+                <a:solidFill>
+                  <a:srgbClr val="222222"/>
+                </a:solidFill>
+                <a:latin typeface="맑은 고딕"/>
+              </a:rPr>
+              <a:t>MOUNTED</a:t>
+            </a:r>
+            <a:r>
+              <a:rPr sz="1700" b="0">
+                <a:solidFill>
+                  <a:srgbClr val="222222"/>
+                </a:solidFill>
+                <a:latin typeface="맑은 고딕"/>
+              </a:rPr>
+              <a:t> 로 남는다</a:t>
             </a:r>
           </a:p>
           <a:p>
@@ -7314,7 +7750,16 @@
                 </a:solidFill>
                 <a:latin typeface="맑은 고딕"/>
               </a:rPr>
-              <a:t>•  조회하면 **ORA-01219**</a:t>
+              <a:t>•  조회하면 </a:t>
+            </a:r>
+            <a:r>
+              <a:rPr sz="1700" b="1">
+                <a:solidFill>
+                  <a:srgbClr val="222222"/>
+                </a:solidFill>
+                <a:latin typeface="맑은 고딕"/>
+              </a:rPr>
+              <a:t>ORA-01219</a:t>
             </a:r>
           </a:p>
           <a:p>
@@ -7330,7 +7775,26 @@
                 </a:solidFill>
                 <a:latin typeface="맑은 고딕"/>
               </a:rPr>
-              <a:t>•  `ALTER PLUGGABLE DATABASE ... OPEN` 으로 따로 연다</a:t>
+              <a:t>•  </a:t>
+            </a:r>
+            <a:r>
+              <a:rPr sz="1700" b="0">
+                <a:solidFill>
+                  <a:srgbClr val="222222"/>
+                </a:solidFill>
+                <a:latin typeface="Consolas"/>
+                <a:cs typeface="Consolas"/>
+              </a:rPr>
+              <a:t>ALTER PLUGGABLE DATABASE ... OPEN</a:t>
+            </a:r>
+            <a:r>
+              <a:rPr sz="1700" b="0">
+                <a:solidFill>
+                  <a:srgbClr val="222222"/>
+                </a:solidFill>
+                <a:latin typeface="맑은 고딕"/>
+              </a:rPr>
+              <a:t> 으로 따로 연다</a:t>
             </a:r>
           </a:p>
           <a:p>
@@ -7525,7 +7989,64 @@
                 </a:solidFill>
                 <a:latin typeface="맑은 고딕"/>
               </a:rPr>
-              <a:t>•  CDB — `CREATE TABLE` / `INSERT` / `COMMIT` 모두 성공</a:t>
+              <a:t>•  CDB — </a:t>
+            </a:r>
+            <a:r>
+              <a:rPr sz="1700" b="0">
+                <a:solidFill>
+                  <a:srgbClr val="222222"/>
+                </a:solidFill>
+                <a:latin typeface="Consolas"/>
+                <a:cs typeface="Consolas"/>
+              </a:rPr>
+              <a:t>CREATE TABLE</a:t>
+            </a:r>
+            <a:r>
+              <a:rPr sz="1700" b="0">
+                <a:solidFill>
+                  <a:srgbClr val="222222"/>
+                </a:solidFill>
+                <a:latin typeface="맑은 고딕"/>
+              </a:rPr>
+              <a:t> / </a:t>
+            </a:r>
+            <a:r>
+              <a:rPr sz="1700" b="0">
+                <a:solidFill>
+                  <a:srgbClr val="222222"/>
+                </a:solidFill>
+                <a:latin typeface="Consolas"/>
+                <a:cs typeface="Consolas"/>
+              </a:rPr>
+              <a:t>INSERT</a:t>
+            </a:r>
+            <a:r>
+              <a:rPr sz="1700" b="0">
+                <a:solidFill>
+                  <a:srgbClr val="222222"/>
+                </a:solidFill>
+                <a:latin typeface="맑은 고딕"/>
+              </a:rPr>
+              <a:t> / </a:t>
+            </a:r>
+            <a:r>
+              <a:rPr sz="1700" b="0">
+                <a:solidFill>
+                  <a:srgbClr val="222222"/>
+                </a:solidFill>
+                <a:latin typeface="Consolas"/>
+                <a:cs typeface="Consolas"/>
+              </a:rPr>
+              <a:t>COMMIT</a:t>
+            </a:r>
+            <a:r>
+              <a:rPr sz="1700" b="0">
+                <a:solidFill>
+                  <a:srgbClr val="222222"/>
+                </a:solidFill>
+                <a:latin typeface="맑은 고딕"/>
+              </a:rPr>
+              <a:t> 모두 성공</a:t>
             </a:r>
           </a:p>
           <a:p>
@@ -7541,7 +8062,55 @@
                 </a:solidFill>
                 <a:latin typeface="맑은 고딕"/>
               </a:rPr>
-              <a:t>•  기존 행 `UPDATE` — `before-snapshot` → `modified-on-snapshot`</a:t>
+              <a:t>•  기존 행 </a:t>
+            </a:r>
+            <a:r>
+              <a:rPr sz="1700" b="0">
+                <a:solidFill>
+                  <a:srgbClr val="222222"/>
+                </a:solidFill>
+                <a:latin typeface="Consolas"/>
+                <a:cs typeface="Consolas"/>
+              </a:rPr>
+              <a:t>UPDATE</a:t>
+            </a:r>
+            <a:r>
+              <a:rPr sz="1700" b="0">
+                <a:solidFill>
+                  <a:srgbClr val="222222"/>
+                </a:solidFill>
+                <a:latin typeface="맑은 고딕"/>
+              </a:rPr>
+              <a:t> — </a:t>
+            </a:r>
+            <a:r>
+              <a:rPr sz="1700" b="0">
+                <a:solidFill>
+                  <a:srgbClr val="222222"/>
+                </a:solidFill>
+                <a:latin typeface="Consolas"/>
+                <a:cs typeface="Consolas"/>
+              </a:rPr>
+              <a:t>before-snapshot</a:t>
+            </a:r>
+            <a:r>
+              <a:rPr sz="1700" b="0">
+                <a:solidFill>
+                  <a:srgbClr val="222222"/>
+                </a:solidFill>
+                <a:latin typeface="맑은 고딕"/>
+              </a:rPr>
+              <a:t> → </a:t>
+            </a:r>
+            <a:r>
+              <a:rPr sz="1700" b="0">
+                <a:solidFill>
+                  <a:srgbClr val="222222"/>
+                </a:solidFill>
+                <a:latin typeface="Consolas"/>
+                <a:cs typeface="Consolas"/>
+              </a:rPr>
+              <a:t>modified-on-snapshot</a:t>
             </a:r>
           </a:p>
           <a:p>
@@ -7573,7 +8142,25 @@
                 </a:solidFill>
                 <a:latin typeface="맑은 고딕"/>
               </a:rPr>
-              <a:t>•  9장에서 같은 명령이 **ORA-16000** 을 냈던 것과 대조</a:t>
+              <a:t>•  9장에서 같은 명령이 </a:t>
+            </a:r>
+            <a:r>
+              <a:rPr sz="1700" b="1">
+                <a:solidFill>
+                  <a:srgbClr val="222222"/>
+                </a:solidFill>
+                <a:latin typeface="맑은 고딕"/>
+              </a:rPr>
+              <a:t>ORA-16000</a:t>
+            </a:r>
+            <a:r>
+              <a:rPr sz="1700" b="0">
+                <a:solidFill>
+                  <a:srgbClr val="222222"/>
+                </a:solidFill>
+                <a:latin typeface="맑은 고딕"/>
+              </a:rPr>
+              <a:t> 을 냈던 것과 대조</a:t>
             </a:r>
           </a:p>
         </p:txBody>
@@ -7752,7 +8339,44 @@
                 </a:solidFill>
                 <a:latin typeface="맑은 고딕"/>
               </a:rPr>
-              <a:t>•  MOUNTED 에서 `CURRENT_SCN` → **0** (열려 있어야 값이 나온다)</a:t>
+              <a:t>•  MOUNTED 에서 </a:t>
+            </a:r>
+            <a:r>
+              <a:rPr sz="1700" b="0">
+                <a:solidFill>
+                  <a:srgbClr val="222222"/>
+                </a:solidFill>
+                <a:latin typeface="Consolas"/>
+                <a:cs typeface="Consolas"/>
+              </a:rPr>
+              <a:t>CURRENT_SCN</a:t>
+            </a:r>
+            <a:r>
+              <a:rPr sz="1700" b="0">
+                <a:solidFill>
+                  <a:srgbClr val="222222"/>
+                </a:solidFill>
+                <a:latin typeface="맑은 고딕"/>
+              </a:rPr>
+              <a:t> → </a:t>
+            </a:r>
+            <a:r>
+              <a:rPr sz="1700" b="1">
+                <a:solidFill>
+                  <a:srgbClr val="222222"/>
+                </a:solidFill>
+                <a:latin typeface="맑은 고딕"/>
+              </a:rPr>
+              <a:t>0</a:t>
+            </a:r>
+            <a:r>
+              <a:rPr sz="1700" b="0">
+                <a:solidFill>
+                  <a:srgbClr val="222222"/>
+                </a:solidFill>
+                <a:latin typeface="맑은 고딕"/>
+              </a:rPr>
+              <a:t> (열려 있어야 값이 나온다)</a:t>
             </a:r>
           </a:p>
           <a:p>
@@ -7768,7 +8392,53 @@
                 </a:solidFill>
                 <a:latin typeface="맑은 고딕"/>
               </a:rPr>
-              <a:t>•  연 뒤 쓰기 → 복원 지점 **2255344** / `CURRENT_SCN` **2256351**</a:t>
+              <a:t>•  연 뒤 쓰기 → 복원 지점 </a:t>
+            </a:r>
+            <a:r>
+              <a:rPr sz="1700" b="1">
+                <a:solidFill>
+                  <a:srgbClr val="222222"/>
+                </a:solidFill>
+                <a:latin typeface="맑은 고딕"/>
+              </a:rPr>
+              <a:t>2255344</a:t>
+            </a:r>
+            <a:r>
+              <a:rPr sz="1700" b="0">
+                <a:solidFill>
+                  <a:srgbClr val="222222"/>
+                </a:solidFill>
+                <a:latin typeface="맑은 고딕"/>
+              </a:rPr>
+              <a:t> / </a:t>
+            </a:r>
+            <a:r>
+              <a:rPr sz="1700" b="0">
+                <a:solidFill>
+                  <a:srgbClr val="222222"/>
+                </a:solidFill>
+                <a:latin typeface="Consolas"/>
+                <a:cs typeface="Consolas"/>
+              </a:rPr>
+              <a:t>CURRENT_SCN</a:t>
+            </a:r>
+            <a:r>
+              <a:rPr sz="1700" b="0">
+                <a:solidFill>
+                  <a:srgbClr val="222222"/>
+                </a:solidFill>
+                <a:latin typeface="맑은 고딕"/>
+              </a:rPr>
+              <a:t> </a:t>
+            </a:r>
+            <a:r>
+              <a:rPr sz="1700" b="1">
+                <a:solidFill>
+                  <a:srgbClr val="222222"/>
+                </a:solidFill>
+                <a:latin typeface="맑은 고딕"/>
+              </a:rPr>
+              <a:t>2256351</a:t>
             </a:r>
           </a:p>
           <a:p>
@@ -7784,7 +8454,25 @@
                 </a:solidFill>
                 <a:latin typeface="맑은 고딕"/>
               </a:rPr>
-              <a:t>•  차이 **1,007** 이 되돌릴 양</a:t>
+              <a:t>•  차이 </a:t>
+            </a:r>
+            <a:r>
+              <a:rPr sz="1700" b="1">
+                <a:solidFill>
+                  <a:srgbClr val="222222"/>
+                </a:solidFill>
+                <a:latin typeface="맑은 고딕"/>
+              </a:rPr>
+              <a:t>1,007</a:t>
+            </a:r>
+            <a:r>
+              <a:rPr sz="1700" b="0">
+                <a:solidFill>
+                  <a:srgbClr val="222222"/>
+                </a:solidFill>
+                <a:latin typeface="맑은 고딕"/>
+              </a:rPr>
+              <a:t> 이 되돌릴 양</a:t>
             </a:r>
           </a:p>
           <a:p>
@@ -8470,7 +9158,16 @@
                 </a:solidFill>
                 <a:latin typeface="맑은 고딕"/>
               </a:rPr>
-              <a:t>•  Snapshot Standby 에서 MRP 기동 → **ORA-01665**</a:t>
+              <a:t>•  Snapshot Standby 에서 MRP 기동 → </a:t>
+            </a:r>
+            <a:r>
+              <a:rPr sz="1700" b="1">
+                <a:solidFill>
+                  <a:srgbClr val="222222"/>
+                </a:solidFill>
+                <a:latin typeface="맑은 고딕"/>
+              </a:rPr>
+              <a:t>ORA-01665</a:t>
             </a:r>
           </a:p>
           <a:p>
@@ -8502,7 +9199,16 @@
                 </a:solidFill>
                 <a:latin typeface="맑은 고딕"/>
               </a:rPr>
-              <a:t>•  **MRP 를 띄울 수 있는 것은 Standby 컨트롤 파일뿐**</a:t>
+              <a:t>•  </a:t>
+            </a:r>
+            <a:r>
+              <a:rPr sz="1700" b="1">
+                <a:solidFill>
+                  <a:srgbClr val="222222"/>
+                </a:solidFill>
+                <a:latin typeface="맑은 고딕"/>
+              </a:rPr>
+              <a:t>MRP 를 띄울 수 있는 것은 Standby 컨트롤 파일뿐</a:t>
             </a:r>
           </a:p>
           <a:p>
@@ -8518,7 +9224,25 @@
                 </a:solidFill>
                 <a:latin typeface="맑은 고딕"/>
               </a:rPr>
-              <a:t>•  오라클이 이 판단을 **역할이 아니라 컨트롤 파일 유형**으로 한다</a:t>
+              <a:t>•  오라클이 이 판단을 </a:t>
+            </a:r>
+            <a:r>
+              <a:rPr sz="1700" b="1">
+                <a:solidFill>
+                  <a:srgbClr val="222222"/>
+                </a:solidFill>
+                <a:latin typeface="맑은 고딕"/>
+              </a:rPr>
+              <a:t>역할이 아니라 컨트롤 파일 유형</a:t>
+            </a:r>
+            <a:r>
+              <a:rPr sz="1700" b="0">
+                <a:solidFill>
+                  <a:srgbClr val="222222"/>
+                </a:solidFill>
+                <a:latin typeface="맑은 고딕"/>
+              </a:rPr>
+              <a:t>으로 한다</a:t>
             </a:r>
           </a:p>
           <a:p>
@@ -8534,7 +9258,44 @@
                 </a:solidFill>
                 <a:latin typeface="맑은 고딕"/>
               </a:rPr>
-              <a:t>•  `RECOVERY_MODE` = **IDLE**, MRP0 = 0개</a:t>
+              <a:t>•  </a:t>
+            </a:r>
+            <a:r>
+              <a:rPr sz="1700" b="0">
+                <a:solidFill>
+                  <a:srgbClr val="222222"/>
+                </a:solidFill>
+                <a:latin typeface="Consolas"/>
+                <a:cs typeface="Consolas"/>
+              </a:rPr>
+              <a:t>RECOVERY_MODE</a:t>
+            </a:r>
+            <a:r>
+              <a:rPr sz="1700" b="0">
+                <a:solidFill>
+                  <a:srgbClr val="222222"/>
+                </a:solidFill>
+                <a:latin typeface="맑은 고딕"/>
+              </a:rPr>
+              <a:t> = </a:t>
+            </a:r>
+            <a:r>
+              <a:rPr sz="1700" b="1">
+                <a:solidFill>
+                  <a:srgbClr val="222222"/>
+                </a:solidFill>
+                <a:latin typeface="맑은 고딕"/>
+              </a:rPr>
+              <a:t>IDLE</a:t>
+            </a:r>
+            <a:r>
+              <a:rPr sz="1700" b="0">
+                <a:solidFill>
+                  <a:srgbClr val="222222"/>
+                </a:solidFill>
+                <a:latin typeface="맑은 고딕"/>
+              </a:rPr>
+              <a:t>, MRP0 = 0개</a:t>
             </a:r>
           </a:p>
         </p:txBody>
@@ -8713,7 +9474,44 @@
                 </a:solidFill>
                 <a:latin typeface="맑은 고딕"/>
               </a:rPr>
-              <a:t>•  `transport lag` — **+00 00:00:00** (계속 받는다)</a:t>
+              <a:t>•  </a:t>
+            </a:r>
+            <a:r>
+              <a:rPr sz="1700" b="0">
+                <a:solidFill>
+                  <a:srgbClr val="222222"/>
+                </a:solidFill>
+                <a:latin typeface="Consolas"/>
+                <a:cs typeface="Consolas"/>
+              </a:rPr>
+              <a:t>transport lag</a:t>
+            </a:r>
+            <a:r>
+              <a:rPr sz="1700" b="0">
+                <a:solidFill>
+                  <a:srgbClr val="222222"/>
+                </a:solidFill>
+                <a:latin typeface="맑은 고딕"/>
+              </a:rPr>
+              <a:t> — </a:t>
+            </a:r>
+            <a:r>
+              <a:rPr sz="1700" b="1">
+                <a:solidFill>
+                  <a:srgbClr val="222222"/>
+                </a:solidFill>
+                <a:latin typeface="맑은 고딕"/>
+              </a:rPr>
+              <a:t>+00 00:00:00</a:t>
+            </a:r>
+            <a:r>
+              <a:rPr sz="1700" b="0">
+                <a:solidFill>
+                  <a:srgbClr val="222222"/>
+                </a:solidFill>
+                <a:latin typeface="맑은 고딕"/>
+              </a:rPr>
+              <a:t> (계속 받는다)</a:t>
             </a:r>
           </a:p>
           <a:p>
@@ -8729,7 +9527,44 @@
                 </a:solidFill>
                 <a:latin typeface="맑은 고딕"/>
               </a:rPr>
-              <a:t>•  `apply lag` — **+00 00:02:38** (적용을 안 한다)</a:t>
+              <a:t>•  </a:t>
+            </a:r>
+            <a:r>
+              <a:rPr sz="1700" b="0">
+                <a:solidFill>
+                  <a:srgbClr val="222222"/>
+                </a:solidFill>
+                <a:latin typeface="Consolas"/>
+                <a:cs typeface="Consolas"/>
+              </a:rPr>
+              <a:t>apply lag</a:t>
+            </a:r>
+            <a:r>
+              <a:rPr sz="1700" b="0">
+                <a:solidFill>
+                  <a:srgbClr val="222222"/>
+                </a:solidFill>
+                <a:latin typeface="맑은 고딕"/>
+              </a:rPr>
+              <a:t> — </a:t>
+            </a:r>
+            <a:r>
+              <a:rPr sz="1700" b="1">
+                <a:solidFill>
+                  <a:srgbClr val="222222"/>
+                </a:solidFill>
+                <a:latin typeface="맑은 고딕"/>
+              </a:rPr>
+              <a:t>+00 00:02:38</a:t>
+            </a:r>
+            <a:r>
+              <a:rPr sz="1700" b="0">
+                <a:solidFill>
+                  <a:srgbClr val="222222"/>
+                </a:solidFill>
+                <a:latin typeface="맑은 고딕"/>
+              </a:rPr>
+              <a:t> (적용을 안 한다)</a:t>
             </a:r>
           </a:p>
           <a:p>
@@ -8761,7 +9596,25 @@
                 </a:solidFill>
                 <a:latin typeface="맑은 고딕"/>
               </a:rPr>
-              <a:t>•  Primary 목적지는 **VALID** — 영향받지 않는다</a:t>
+              <a:t>•  Primary 목적지는 </a:t>
+            </a:r>
+            <a:r>
+              <a:rPr sz="1700" b="1">
+                <a:solidFill>
+                  <a:srgbClr val="222222"/>
+                </a:solidFill>
+                <a:latin typeface="맑은 고딕"/>
+              </a:rPr>
+              <a:t>VALID</a:t>
+            </a:r>
+            <a:r>
+              <a:rPr sz="1700" b="0">
+                <a:solidFill>
+                  <a:srgbClr val="222222"/>
+                </a:solidFill>
+                <a:latin typeface="맑은 고딕"/>
+              </a:rPr>
+              <a:t> — 영향받지 않는다</a:t>
             </a:r>
           </a:p>
         </p:txBody>
@@ -8956,7 +9809,25 @@
                 </a:solidFill>
                 <a:latin typeface="맑은 고딕"/>
               </a:rPr>
-              <a:t>•  Primary 가 그것을 지우면 **갭**이 된다</a:t>
+              <a:t>•  Primary 가 그것을 지우면 </a:t>
+            </a:r>
+            <a:r>
+              <a:rPr sz="1700" b="1">
+                <a:solidFill>
+                  <a:srgbClr val="222222"/>
+                </a:solidFill>
+                <a:latin typeface="맑은 고딕"/>
+              </a:rPr>
+              <a:t>갭</a:t>
+            </a:r>
+            <a:r>
+              <a:rPr sz="1700" b="0">
+                <a:solidFill>
+                  <a:srgbClr val="222222"/>
+                </a:solidFill>
+                <a:latin typeface="맑은 고딕"/>
+              </a:rPr>
+              <a:t>이 된다</a:t>
             </a:r>
           </a:p>
           <a:p>
@@ -8972,7 +9843,25 @@
                 </a:solidFill>
                 <a:latin typeface="맑은 고딕"/>
               </a:rPr>
-              <a:t>•  다행히 **전송은 계속**되므로 이미 받아 둔 것은 무사하다</a:t>
+              <a:t>•  다행히 </a:t>
+            </a:r>
+            <a:r>
+              <a:rPr sz="1700" b="1">
+                <a:solidFill>
+                  <a:srgbClr val="222222"/>
+                </a:solidFill>
+                <a:latin typeface="맑은 고딕"/>
+              </a:rPr>
+              <a:t>전송은 계속</a:t>
+            </a:r>
+            <a:r>
+              <a:rPr sz="1700" b="0">
+                <a:solidFill>
+                  <a:srgbClr val="222222"/>
+                </a:solidFill>
+                <a:latin typeface="맑은 고딕"/>
+              </a:rPr>
+              <a:t>되므로 이미 받아 둔 것은 무사하다</a:t>
             </a:r>
           </a:p>
           <a:p>
@@ -8988,7 +9877,16 @@
                 </a:solidFill>
                 <a:latin typeface="맑은 고딕"/>
               </a:rPr>
-              <a:t>•  위험한 것은 **전송이 끊겼던 구간**</a:t>
+              <a:t>•  위험한 것은 </a:t>
+            </a:r>
+            <a:r>
+              <a:rPr sz="1700" b="1">
+                <a:solidFill>
+                  <a:srgbClr val="222222"/>
+                </a:solidFill>
+                <a:latin typeface="맑은 고딕"/>
+              </a:rPr>
+              <a:t>전송이 끊겼던 구간</a:t>
             </a:r>
           </a:p>
           <a:p>
@@ -9199,7 +10097,25 @@
                 </a:solidFill>
                 <a:latin typeface="맑은 고딕"/>
               </a:rPr>
-              <a:t>•  전환 후 — **FLASHBACK LOG** 2.6% / 2개 추가</a:t>
+              <a:t>•  전환 후 — </a:t>
+            </a:r>
+            <a:r>
+              <a:rPr sz="1700" b="1">
+                <a:solidFill>
+                  <a:srgbClr val="222222"/>
+                </a:solidFill>
+                <a:latin typeface="맑은 고딕"/>
+              </a:rPr>
+              <a:t>FLASHBACK LOG</a:t>
+            </a:r>
+            <a:r>
+              <a:rPr sz="1700" b="0">
+                <a:solidFill>
+                  <a:srgbClr val="222222"/>
+                </a:solidFill>
+                <a:latin typeface="맑은 고딕"/>
+              </a:rPr>
+              <a:t> 2.6% / 2개 추가</a:t>
             </a:r>
           </a:p>
           <a:p>
@@ -9215,7 +10131,25 @@
                 </a:solidFill>
                 <a:latin typeface="맑은 고딕"/>
               </a:rPr>
-              <a:t>•  1,536MB → **1,941MB** (405MB 증가)</a:t>
+              <a:t>•  1,536MB → </a:t>
+            </a:r>
+            <a:r>
+              <a:rPr sz="1700" b="1">
+                <a:solidFill>
+                  <a:srgbClr val="222222"/>
+                </a:solidFill>
+                <a:latin typeface="맑은 고딕"/>
+              </a:rPr>
+              <a:t>1,941MB</a:t>
+            </a:r>
+            <a:r>
+              <a:rPr sz="1700" b="0">
+                <a:solidFill>
+                  <a:srgbClr val="222222"/>
+                </a:solidFill>
+                <a:latin typeface="맑은 고딕"/>
+              </a:rPr>
+              <a:t> (405MB 증가)</a:t>
             </a:r>
           </a:p>
           <a:p>
@@ -9231,7 +10165,16 @@
                 </a:solidFill>
                 <a:latin typeface="맑은 고딕"/>
               </a:rPr>
-              <a:t>•  몇 건만 바꿨는데 405MB 인 이유 — **블록 단위 이전 이미지**</a:t>
+              <a:t>•  몇 건만 바꿨는데 405MB 인 이유 — </a:t>
+            </a:r>
+            <a:r>
+              <a:rPr sz="1700" b="1">
+                <a:solidFill>
+                  <a:srgbClr val="222222"/>
+                </a:solidFill>
+                <a:latin typeface="맑은 고딕"/>
+              </a:rPr>
+              <a:t>블록 단위 이전 이미지</a:t>
             </a:r>
           </a:p>
         </p:txBody>
@@ -9410,7 +10353,35 @@
                 </a:solidFill>
                 <a:latin typeface="맑은 고딕"/>
               </a:rPr>
-              <a:t>•  144,766행 테이블 생성 후 `STORAGE_SIZE` → **200MB 그대로**</a:t>
+              <a:t>•  144,766행 테이블 생성 후 </a:t>
+            </a:r>
+            <a:r>
+              <a:rPr sz="1700" b="0">
+                <a:solidFill>
+                  <a:srgbClr val="222222"/>
+                </a:solidFill>
+                <a:latin typeface="Consolas"/>
+                <a:cs typeface="Consolas"/>
+              </a:rPr>
+              <a:t>STORAGE_SIZE</a:t>
+            </a:r>
+            <a:r>
+              <a:rPr sz="1700" b="0">
+                <a:solidFill>
+                  <a:srgbClr val="222222"/>
+                </a:solidFill>
+                <a:latin typeface="맑은 고딕"/>
+              </a:rPr>
+              <a:t> → </a:t>
+            </a:r>
+            <a:r>
+              <a:rPr sz="1700" b="1">
+                <a:solidFill>
+                  <a:srgbClr val="222222"/>
+                </a:solidFill>
+                <a:latin typeface="맑은 고딕"/>
+              </a:rPr>
+              <a:t>200MB 그대로</a:t>
             </a:r>
           </a:p>
           <a:p>
@@ -9426,7 +10397,16 @@
                 </a:solidFill>
                 <a:latin typeface="맑은 고딕"/>
               </a:rPr>
-              <a:t>•  이 값은 "쓴 양" 이 아니라 **확보된 크기**</a:t>
+              <a:t>•  이 값은 "쓴 양" 이 아니라 </a:t>
+            </a:r>
+            <a:r>
+              <a:rPr sz="1700" b="1">
+                <a:solidFill>
+                  <a:srgbClr val="222222"/>
+                </a:solidFill>
+                <a:latin typeface="맑은 고딕"/>
+              </a:rPr>
+              <a:t>확보된 크기</a:t>
             </a:r>
           </a:p>
           <a:p>
@@ -9442,7 +10422,44 @@
                 </a:solidFill>
                 <a:latin typeface="맑은 고딕"/>
               </a:rPr>
-              <a:t>•  감시는 `V$FLASH_RECOVERY_AREA_USAGE` 의 **FLASHBACK LOG** 로</a:t>
+              <a:t>•  감시는 </a:t>
+            </a:r>
+            <a:r>
+              <a:rPr sz="1700" b="0">
+                <a:solidFill>
+                  <a:srgbClr val="222222"/>
+                </a:solidFill>
+                <a:latin typeface="Consolas"/>
+                <a:cs typeface="Consolas"/>
+              </a:rPr>
+              <a:t>V$FLASH_RECOVERY_AREA_USAGE</a:t>
+            </a:r>
+            <a:r>
+              <a:rPr sz="1700" b="0">
+                <a:solidFill>
+                  <a:srgbClr val="222222"/>
+                </a:solidFill>
+                <a:latin typeface="맑은 고딕"/>
+              </a:rPr>
+              <a:t> 의 </a:t>
+            </a:r>
+            <a:r>
+              <a:rPr sz="1700" b="1">
+                <a:solidFill>
+                  <a:srgbClr val="222222"/>
+                </a:solidFill>
+                <a:latin typeface="맑은 고딕"/>
+              </a:rPr>
+              <a:t>FLASHBACK LOG</a:t>
+            </a:r>
+            <a:r>
+              <a:rPr sz="1700" b="0">
+                <a:solidFill>
+                  <a:srgbClr val="222222"/>
+                </a:solidFill>
+                <a:latin typeface="맑은 고딕"/>
+              </a:rPr>
+              <a:t> 로</a:t>
             </a:r>
           </a:p>
           <a:p>
@@ -9637,7 +10654,34 @@
                 </a:solidFill>
                 <a:latin typeface="맑은 고딕"/>
               </a:rPr>
-              <a:t>•  첫 전환 SCN **2252853** → 되돌림 → 두 번째 전환 SCN **2253716**</a:t>
+              <a:t>•  첫 전환 SCN </a:t>
+            </a:r>
+            <a:r>
+              <a:rPr sz="1700" b="1">
+                <a:solidFill>
+                  <a:srgbClr val="222222"/>
+                </a:solidFill>
+                <a:latin typeface="맑은 고딕"/>
+              </a:rPr>
+              <a:t>2252853</a:t>
+            </a:r>
+            <a:r>
+              <a:rPr sz="1700" b="0">
+                <a:solidFill>
+                  <a:srgbClr val="222222"/>
+                </a:solidFill>
+                <a:latin typeface="맑은 고딕"/>
+              </a:rPr>
+              <a:t> → 되돌림 → 두 번째 전환 SCN </a:t>
+            </a:r>
+            <a:r>
+              <a:rPr sz="1700" b="1">
+                <a:solidFill>
+                  <a:srgbClr val="222222"/>
+                </a:solidFill>
+                <a:latin typeface="맑은 고딕"/>
+              </a:rPr>
+              <a:t>2253716</a:t>
             </a:r>
           </a:p>
           <a:p>
@@ -9669,7 +10713,25 @@
                 </a:solidFill>
                 <a:latin typeface="맑은 고딕"/>
               </a:rPr>
-              <a:t>•  그래서 **매번 더 최신 데이터**에서 시작한다</a:t>
+              <a:t>•  그래서 </a:t>
+            </a:r>
+            <a:r>
+              <a:rPr sz="1700" b="1">
+                <a:solidFill>
+                  <a:srgbClr val="222222"/>
+                </a:solidFill>
+                <a:latin typeface="맑은 고딕"/>
+              </a:rPr>
+              <a:t>매번 더 최신 데이터</a:t>
+            </a:r>
+            <a:r>
+              <a:rPr sz="1700" b="0">
+                <a:solidFill>
+                  <a:srgbClr val="222222"/>
+                </a:solidFill>
+                <a:latin typeface="맑은 고딕"/>
+              </a:rPr>
+              <a:t>에서 시작한다</a:t>
             </a:r>
           </a:p>
           <a:p>
@@ -9928,7 +10990,25 @@
                 </a:solidFill>
                 <a:latin typeface="맑은 고딕"/>
               </a:rPr>
-              <a:t>•  **①이 첫 단계인 것**이 핵심이다</a:t>
+              <a:t>•  </a:t>
+            </a:r>
+            <a:r>
+              <a:rPr sz="1700" b="1">
+                <a:solidFill>
+                  <a:srgbClr val="222222"/>
+                </a:solidFill>
+                <a:latin typeface="맑은 고딕"/>
+              </a:rPr>
+              <a:t>①이 첫 단계인 것</a:t>
+            </a:r>
+            <a:r>
+              <a:rPr sz="1700" b="0">
+                <a:solidFill>
+                  <a:srgbClr val="222222"/>
+                </a:solidFill>
+                <a:latin typeface="맑은 고딕"/>
+              </a:rPr>
+              <a:t>이 핵심이다</a:t>
             </a:r>
           </a:p>
         </p:txBody>
@@ -10362,7 +11442,36 @@
                 </a:solidFill>
                 <a:latin typeface="맑은 고딕"/>
               </a:rPr>
-              <a:t>•  `SHUTDOWN IMMEDIATE` → `STARTUP MOUNT`</a:t>
+              <a:t>•  </a:t>
+            </a:r>
+            <a:r>
+              <a:rPr sz="1700" b="0">
+                <a:solidFill>
+                  <a:srgbClr val="222222"/>
+                </a:solidFill>
+                <a:latin typeface="Consolas"/>
+                <a:cs typeface="Consolas"/>
+              </a:rPr>
+              <a:t>SHUTDOWN IMMEDIATE</a:t>
+            </a:r>
+            <a:r>
+              <a:rPr sz="1700" b="0">
+                <a:solidFill>
+                  <a:srgbClr val="222222"/>
+                </a:solidFill>
+                <a:latin typeface="맑은 고딕"/>
+              </a:rPr>
+              <a:t> → </a:t>
+            </a:r>
+            <a:r>
+              <a:rPr sz="1700" b="0">
+                <a:solidFill>
+                  <a:srgbClr val="222222"/>
+                </a:solidFill>
+                <a:latin typeface="Consolas"/>
+                <a:cs typeface="Consolas"/>
+              </a:rPr>
+              <a:t>STARTUP MOUNT</a:t>
             </a:r>
           </a:p>
           <a:p>
@@ -10378,7 +11487,17 @@
                 </a:solidFill>
                 <a:latin typeface="맑은 고딕"/>
               </a:rPr>
-              <a:t>•  `ALTER DATABASE CONVERT TO PHYSICAL STANDBY`</a:t>
+              <a:t>•  </a:t>
+            </a:r>
+            <a:r>
+              <a:rPr sz="1700" b="0">
+                <a:solidFill>
+                  <a:srgbClr val="222222"/>
+                </a:solidFill>
+                <a:latin typeface="Consolas"/>
+                <a:cs typeface="Consolas"/>
+              </a:rPr>
+              <a:t>ALTER DATABASE CONVERT TO PHYSICAL STANDBY</a:t>
             </a:r>
           </a:p>
           <a:p>
@@ -10394,7 +11513,17 @@
                 </a:solidFill>
                 <a:latin typeface="맑은 고딕"/>
               </a:rPr>
-              <a:t>•  결과 — `PHYSICAL STANDBY / STANDBY / NO`</a:t>
+              <a:t>•  결과 — </a:t>
+            </a:r>
+            <a:r>
+              <a:rPr sz="1700" b="0">
+                <a:solidFill>
+                  <a:srgbClr val="222222"/>
+                </a:solidFill>
+                <a:latin typeface="Consolas"/>
+                <a:cs typeface="Consolas"/>
+              </a:rPr>
+              <a:t>PHYSICAL STANDBY / STANDBY / NO</a:t>
             </a:r>
           </a:p>
           <a:p>
@@ -10410,7 +11539,44 @@
                 </a:solidFill>
                 <a:latin typeface="맑은 고딕"/>
               </a:rPr>
-              <a:t>•  **복원 지점이 사라진다** (`V$RESTORE_POINT` 0행)</a:t>
+              <a:t>•  </a:t>
+            </a:r>
+            <a:r>
+              <a:rPr sz="1700" b="1">
+                <a:solidFill>
+                  <a:srgbClr val="222222"/>
+                </a:solidFill>
+                <a:latin typeface="맑은 고딕"/>
+              </a:rPr>
+              <a:t>복원 지점이 사라진다</a:t>
+            </a:r>
+            <a:r>
+              <a:rPr sz="1700" b="0">
+                <a:solidFill>
+                  <a:srgbClr val="222222"/>
+                </a:solidFill>
+                <a:latin typeface="맑은 고딕"/>
+              </a:rPr>
+              <a:t> (</a:t>
+            </a:r>
+            <a:r>
+              <a:rPr sz="1700" b="0">
+                <a:solidFill>
+                  <a:srgbClr val="222222"/>
+                </a:solidFill>
+                <a:latin typeface="Consolas"/>
+                <a:cs typeface="Consolas"/>
+              </a:rPr>
+              <a:t>V$RESTORE_POINT</a:t>
+            </a:r>
+            <a:r>
+              <a:rPr sz="1700" b="0">
+                <a:solidFill>
+                  <a:srgbClr val="222222"/>
+                </a:solidFill>
+                <a:latin typeface="맑은 고딕"/>
+              </a:rPr>
+              <a:t> 0행)</a:t>
             </a:r>
           </a:p>
           <a:p>
@@ -10621,7 +11787,45 @@
                 </a:solidFill>
                 <a:latin typeface="맑은 고딕"/>
               </a:rPr>
-              <a:t>•  ② `SHUTDOWN` → `STARTUP MOUNT` — 되감으려면 아무도 안 써야 한다</a:t>
+              <a:t>•  ② </a:t>
+            </a:r>
+            <a:r>
+              <a:rPr sz="1700" b="0">
+                <a:solidFill>
+                  <a:srgbClr val="222222"/>
+                </a:solidFill>
+                <a:latin typeface="Consolas"/>
+                <a:cs typeface="Consolas"/>
+              </a:rPr>
+              <a:t>SHUTDOWN</a:t>
+            </a:r>
+            <a:r>
+              <a:rPr sz="1700" b="0">
+                <a:solidFill>
+                  <a:srgbClr val="222222"/>
+                </a:solidFill>
+                <a:latin typeface="맑은 고딕"/>
+              </a:rPr>
+              <a:t> → </a:t>
+            </a:r>
+            <a:r>
+              <a:rPr sz="1700" b="0">
+                <a:solidFill>
+                  <a:srgbClr val="222222"/>
+                </a:solidFill>
+                <a:latin typeface="Consolas"/>
+                <a:cs typeface="Consolas"/>
+              </a:rPr>
+              <a:t>STARTUP MOUNT</a:t>
+            </a:r>
+            <a:r>
+              <a:rPr sz="1700" b="0">
+                <a:solidFill>
+                  <a:srgbClr val="222222"/>
+                </a:solidFill>
+                <a:latin typeface="맑은 고딕"/>
+              </a:rPr>
+              <a:t> — 되감으려면 아무도 안 써야 한다</a:t>
             </a:r>
           </a:p>
           <a:p>
@@ -10637,7 +11841,17 @@
                 </a:solidFill>
                 <a:latin typeface="맑은 고딕"/>
               </a:rPr>
-              <a:t>•  ③ `CONVERT TO PHYSICAL STANDBY`</a:t>
+              <a:t>•  ③ </a:t>
+            </a:r>
+            <a:r>
+              <a:rPr sz="1700" b="0">
+                <a:solidFill>
+                  <a:srgbClr val="222222"/>
+                </a:solidFill>
+                <a:latin typeface="Consolas"/>
+                <a:cs typeface="Consolas"/>
+              </a:rPr>
+              <a:t>CONVERT TO PHYSICAL STANDBY</a:t>
             </a:r>
           </a:p>
           <a:p>
@@ -10669,7 +11883,26 @@
                 </a:solidFill>
                 <a:latin typeface="맑은 고딕"/>
               </a:rPr>
-              <a:t>•  ⑤ `OPEN READ ONLY` → ⑥ MRP 기동 → ⑦ PDB 열기</a:t>
+              <a:t>•  ⑤ </a:t>
+            </a:r>
+            <a:r>
+              <a:rPr sz="1700" b="0">
+                <a:solidFill>
+                  <a:srgbClr val="222222"/>
+                </a:solidFill>
+                <a:latin typeface="Consolas"/>
+                <a:cs typeface="Consolas"/>
+              </a:rPr>
+              <a:t>OPEN READ ONLY</a:t>
+            </a:r>
+            <a:r>
+              <a:rPr sz="1700" b="0">
+                <a:solidFill>
+                  <a:srgbClr val="222222"/>
+                </a:solidFill>
+                <a:latin typeface="맑은 고딕"/>
+              </a:rPr>
+              <a:t> → ⑥ MRP 기동 → ⑦ PDB 열기</a:t>
             </a:r>
           </a:p>
         </p:txBody>
@@ -11084,7 +12317,17 @@
                 </a:solidFill>
                 <a:latin typeface="맑은 고딕"/>
               </a:rPr>
-              <a:t>•  `ORA-10456: cannot open standby database; media recovery session may be in progress`</a:t>
+              <a:t>•  </a:t>
+            </a:r>
+            <a:r>
+              <a:rPr sz="1700" b="0">
+                <a:solidFill>
+                  <a:srgbClr val="222222"/>
+                </a:solidFill>
+                <a:latin typeface="Consolas"/>
+                <a:cs typeface="Consolas"/>
+              </a:rPr>
+              <a:t>ORA-10456: cannot open standby database; media recovery session may be in progress</a:t>
             </a:r>
           </a:p>
           <a:p>
@@ -11100,7 +12343,16 @@
                 </a:solidFill>
                 <a:latin typeface="맑은 고딕"/>
               </a:rPr>
-              <a:t>•  올바른 순서 — **MRP 취소 → OPEN READ ONLY → MRP 기동**</a:t>
+              <a:t>•  올바른 순서 — </a:t>
+            </a:r>
+            <a:r>
+              <a:rPr sz="1700" b="1">
+                <a:solidFill>
+                  <a:srgbClr val="222222"/>
+                </a:solidFill>
+                <a:latin typeface="맑은 고딕"/>
+              </a:rPr>
+              <a:t>MRP 취소 → OPEN READ ONLY → MRP 기동</a:t>
             </a:r>
           </a:p>
           <a:p>
@@ -11116,7 +12368,17 @@
                 </a:solidFill>
                 <a:latin typeface="맑은 고딕"/>
               </a:rPr>
-              <a:t>•  결과 — `READ ONLY WITH APPLY`</a:t>
+              <a:t>•  결과 — </a:t>
+            </a:r>
+            <a:r>
+              <a:rPr sz="1700" b="0">
+                <a:solidFill>
+                  <a:srgbClr val="222222"/>
+                </a:solidFill>
+                <a:latin typeface="Consolas"/>
+                <a:cs typeface="Consolas"/>
+              </a:rPr>
+              <a:t>READ ONLY WITH APPLY</a:t>
             </a:r>
           </a:p>
         </p:txBody>
@@ -11295,7 +12557,27 @@
                 </a:solidFill>
                 <a:latin typeface="맑은 고딕"/>
               </a:rPr>
-              <a:t>•  Snapshot Standby — `ALTER PLUGGABLE DATABASE ... **OPEN**`</a:t>
+              <a:t>•  Snapshot Standby — </a:t>
+            </a:r>
+            <a:r>
+              <a:rPr sz="1700" b="0">
+                <a:solidFill>
+                  <a:srgbClr val="222222"/>
+                </a:solidFill>
+                <a:latin typeface="Consolas"/>
+                <a:cs typeface="Consolas"/>
+              </a:rPr>
+              <a:t>ALTER PLUGGABLE DATABASE ... </a:t>
+            </a:r>
+            <a:r>
+              <a:rPr sz="1700" b="1">
+                <a:solidFill>
+                  <a:srgbClr val="222222"/>
+                </a:solidFill>
+                <a:latin typeface="Consolas"/>
+                <a:cs typeface="Consolas"/>
+              </a:rPr>
+              <a:t>OPEN</a:t>
             </a:r>
           </a:p>
           <a:p>
@@ -11311,7 +12593,27 @@
                 </a:solidFill>
                 <a:latin typeface="맑은 고딕"/>
               </a:rPr>
-              <a:t>•  Physical Standby — `ALTER PLUGGABLE DATABASE ... **OPEN READ ONLY**`</a:t>
+              <a:t>•  Physical Standby — </a:t>
+            </a:r>
+            <a:r>
+              <a:rPr sz="1700" b="0">
+                <a:solidFill>
+                  <a:srgbClr val="222222"/>
+                </a:solidFill>
+                <a:latin typeface="Consolas"/>
+                <a:cs typeface="Consolas"/>
+              </a:rPr>
+              <a:t>ALTER PLUGGABLE DATABASE ... </a:t>
+            </a:r>
+            <a:r>
+              <a:rPr sz="1700" b="1">
+                <a:solidFill>
+                  <a:srgbClr val="222222"/>
+                </a:solidFill>
+                <a:latin typeface="Consolas"/>
+                <a:cs typeface="Consolas"/>
+              </a:rPr>
+              <a:t>OPEN READ ONLY</a:t>
             </a:r>
           </a:p>
           <a:p>
@@ -11327,7 +12629,36 @@
                 </a:solidFill>
                 <a:latin typeface="맑은 고딕"/>
               </a:rPr>
-              <a:t>•  CDB 도 마찬가지 — Snapshot 은 `OPEN`, Physical 은 `OPEN READ ONLY`</a:t>
+              <a:t>•  CDB 도 마찬가지 — Snapshot 은 </a:t>
+            </a:r>
+            <a:r>
+              <a:rPr sz="1700" b="0">
+                <a:solidFill>
+                  <a:srgbClr val="222222"/>
+                </a:solidFill>
+                <a:latin typeface="Consolas"/>
+                <a:cs typeface="Consolas"/>
+              </a:rPr>
+              <a:t>OPEN</a:t>
+            </a:r>
+            <a:r>
+              <a:rPr sz="1700" b="0">
+                <a:solidFill>
+                  <a:srgbClr val="222222"/>
+                </a:solidFill>
+                <a:latin typeface="맑은 고딕"/>
+              </a:rPr>
+              <a:t>, Physical 은 </a:t>
+            </a:r>
+            <a:r>
+              <a:rPr sz="1700" b="0">
+                <a:solidFill>
+                  <a:srgbClr val="222222"/>
+                </a:solidFill>
+                <a:latin typeface="Consolas"/>
+                <a:cs typeface="Consolas"/>
+              </a:rPr>
+              <a:t>OPEN READ ONLY</a:t>
             </a:r>
           </a:p>
           <a:p>
@@ -11343,7 +12674,16 @@
                 </a:solidFill>
                 <a:latin typeface="맑은 고딕"/>
               </a:rPr>
-              <a:t>•  어느 쪽이든 **CDB 를 열어도 PDB 는 따라오지 않는다**</a:t>
+              <a:t>•  어느 쪽이든 </a:t>
+            </a:r>
+            <a:r>
+              <a:rPr sz="1700" b="1">
+                <a:solidFill>
+                  <a:srgbClr val="222222"/>
+                </a:solidFill>
+                <a:latin typeface="맑은 고딕"/>
+              </a:rPr>
+              <a:t>CDB 를 열어도 PDB 는 따라오지 않는다</a:t>
             </a:r>
           </a:p>
         </p:txBody>
@@ -11522,7 +12862,25 @@
                 </a:solidFill>
                 <a:latin typeface="맑은 고딕"/>
               </a:rPr>
-              <a:t>•  Snapshot 에서 만든 테이블 → **ORA-00942** (존재 자체가 없다)</a:t>
+              <a:t>•  Snapshot 에서 만든 테이블 → </a:t>
+            </a:r>
+            <a:r>
+              <a:rPr sz="1700" b="1">
+                <a:solidFill>
+                  <a:srgbClr val="222222"/>
+                </a:solidFill>
+                <a:latin typeface="맑은 고딕"/>
+              </a:rPr>
+              <a:t>ORA-00942</a:t>
+            </a:r>
+            <a:r>
+              <a:rPr sz="1700" b="0">
+                <a:solidFill>
+                  <a:srgbClr val="222222"/>
+                </a:solidFill>
+                <a:latin typeface="맑은 고딕"/>
+              </a:rPr>
+              <a:t> (존재 자체가 없다)</a:t>
             </a:r>
           </a:p>
           <a:p>
@@ -11538,7 +12896,45 @@
                 </a:solidFill>
                 <a:latin typeface="맑은 고딕"/>
               </a:rPr>
-              <a:t>•  고친 행 → `modified-on-snapshot` → **`before-snapshot`** 복귀</a:t>
+              <a:t>•  고친 행 → </a:t>
+            </a:r>
+            <a:r>
+              <a:rPr sz="1700" b="0">
+                <a:solidFill>
+                  <a:srgbClr val="222222"/>
+                </a:solidFill>
+                <a:latin typeface="Consolas"/>
+                <a:cs typeface="Consolas"/>
+              </a:rPr>
+              <a:t>modified-on-snapshot</a:t>
+            </a:r>
+            <a:r>
+              <a:rPr sz="1700" b="0">
+                <a:solidFill>
+                  <a:srgbClr val="222222"/>
+                </a:solidFill>
+                <a:latin typeface="맑은 고딕"/>
+              </a:rPr>
+              <a:t> → </a:t>
+            </a:r>
+            <a:r>
+              <a:rPr sz="1700" b="1">
+                <a:solidFill>
+                  <a:srgbClr val="222222"/>
+                </a:solidFill>
+                <a:latin typeface="Consolas"/>
+                <a:cs typeface="Consolas"/>
+              </a:rPr>
+              <a:t>before-snapshot</a:t>
+            </a:r>
+            <a:r>
+              <a:rPr sz="1700" b="0">
+                <a:solidFill>
+                  <a:srgbClr val="222222"/>
+                </a:solidFill>
+                <a:latin typeface="맑은 고딕"/>
+              </a:rPr>
+              <a:t> 복귀</a:t>
             </a:r>
           </a:p>
           <a:p>
@@ -11554,7 +12950,16 @@
                 </a:solidFill>
                 <a:latin typeface="맑은 고딕"/>
               </a:rPr>
-              <a:t>•  그동안 Primary 가 넣은 2·3번 행 → **나타났다**</a:t>
+              <a:t>•  그동안 Primary 가 넣은 2·3번 행 → </a:t>
+            </a:r>
+            <a:r>
+              <a:rPr sz="1700" b="1">
+                <a:solidFill>
+                  <a:srgbClr val="222222"/>
+                </a:solidFill>
+                <a:latin typeface="맑은 고딕"/>
+              </a:rPr>
+              <a:t>나타났다</a:t>
             </a:r>
           </a:p>
           <a:p>
@@ -11570,7 +12975,35 @@
                 </a:solidFill>
                 <a:latin typeface="맑은 고딕"/>
               </a:rPr>
-              <a:t>•  `apply lag` 2분 38초 → **0**</a:t>
+              <a:t>•  </a:t>
+            </a:r>
+            <a:r>
+              <a:rPr sz="1700" b="0">
+                <a:solidFill>
+                  <a:srgbClr val="222222"/>
+                </a:solidFill>
+                <a:latin typeface="Consolas"/>
+                <a:cs typeface="Consolas"/>
+              </a:rPr>
+              <a:t>apply lag</a:t>
+            </a:r>
+            <a:r>
+              <a:rPr sz="1700" b="0">
+                <a:solidFill>
+                  <a:srgbClr val="222222"/>
+                </a:solidFill>
+                <a:latin typeface="맑은 고딕"/>
+              </a:rPr>
+              <a:t> 2분 38초 → </a:t>
+            </a:r>
+            <a:r>
+              <a:rPr sz="1700" b="1">
+                <a:solidFill>
+                  <a:srgbClr val="222222"/>
+                </a:solidFill>
+                <a:latin typeface="맑은 고딕"/>
+              </a:rPr>
+              <a:t>0</a:t>
             </a:r>
           </a:p>
           <a:p>
@@ -11586,7 +13019,16 @@
                 </a:solidFill>
                 <a:latin typeface="맑은 고딕"/>
               </a:rPr>
-              <a:t>•  FRA — FLASHBACK LOG 사라지고 **1,941MB → 1,559MB**</a:t>
+              <a:t>•  FRA — FLASHBACK LOG 사라지고 </a:t>
+            </a:r>
+            <a:r>
+              <a:rPr sz="1700" b="1">
+                <a:solidFill>
+                  <a:srgbClr val="222222"/>
+                </a:solidFill>
+                <a:latin typeface="맑은 고딕"/>
+              </a:rPr>
+              <a:t>1,941MB → 1,559MB</a:t>
             </a:r>
           </a:p>
         </p:txBody>
@@ -11765,7 +13207,17 @@
                 </a:solidFill>
                 <a:latin typeface="맑은 고딕"/>
               </a:rPr>
-              <a:t>•  상태 — `database_role, open_mode, controlfile_type, flashback_on`</a:t>
+              <a:t>•  상태 — </a:t>
+            </a:r>
+            <a:r>
+              <a:rPr sz="1700" b="0">
+                <a:solidFill>
+                  <a:srgbClr val="222222"/>
+                </a:solidFill>
+                <a:latin typeface="Consolas"/>
+                <a:cs typeface="Consolas"/>
+              </a:rPr>
+              <a:t>database_role, open_mode, controlfile_type, flashback_on</a:t>
             </a:r>
           </a:p>
           <a:p>
@@ -11781,7 +13233,17 @@
                 </a:solidFill>
                 <a:latin typeface="맑은 고딕"/>
               </a:rPr>
-              <a:t>•  되돌아갈 자리 — `V$RESTORE_POINT`</a:t>
+              <a:t>•  되돌아갈 자리 — </a:t>
+            </a:r>
+            <a:r>
+              <a:rPr sz="1700" b="0">
+                <a:solidFill>
+                  <a:srgbClr val="222222"/>
+                </a:solidFill>
+                <a:latin typeface="Consolas"/>
+                <a:cs typeface="Consolas"/>
+              </a:rPr>
+              <a:t>V$RESTORE_POINT</a:t>
             </a:r>
           </a:p>
           <a:p>
@@ -11797,7 +13259,36 @@
                 </a:solidFill>
                 <a:latin typeface="맑은 고딕"/>
               </a:rPr>
-              <a:t>•  적용 — `V$ARCHIVE_DEST_STATUS.RECOVERY_MODE`, `V$MANAGED_STANDBY`</a:t>
+              <a:t>•  적용 — </a:t>
+            </a:r>
+            <a:r>
+              <a:rPr sz="1700" b="0">
+                <a:solidFill>
+                  <a:srgbClr val="222222"/>
+                </a:solidFill>
+                <a:latin typeface="Consolas"/>
+                <a:cs typeface="Consolas"/>
+              </a:rPr>
+              <a:t>V$ARCHIVE_DEST_STATUS.RECOVERY_MODE</a:t>
+            </a:r>
+            <a:r>
+              <a:rPr sz="1700" b="0">
+                <a:solidFill>
+                  <a:srgbClr val="222222"/>
+                </a:solidFill>
+                <a:latin typeface="맑은 고딕"/>
+              </a:rPr>
+              <a:t>, </a:t>
+            </a:r>
+            <a:r>
+              <a:rPr sz="1700" b="0">
+                <a:solidFill>
+                  <a:srgbClr val="222222"/>
+                </a:solidFill>
+                <a:latin typeface="Consolas"/>
+                <a:cs typeface="Consolas"/>
+              </a:rPr>
+              <a:t>V$MANAGED_STANDBY</a:t>
             </a:r>
           </a:p>
           <a:p>
@@ -11813,7 +13304,17 @@
                 </a:solidFill>
                 <a:latin typeface="맑은 고딕"/>
               </a:rPr>
-              <a:t>•  지연 — `V$DATAGUARD_STATS`</a:t>
+              <a:t>•  지연 — </a:t>
+            </a:r>
+            <a:r>
+              <a:rPr sz="1700" b="0">
+                <a:solidFill>
+                  <a:srgbClr val="222222"/>
+                </a:solidFill>
+                <a:latin typeface="Consolas"/>
+                <a:cs typeface="Consolas"/>
+              </a:rPr>
+              <a:t>V$DATAGUARD_STATS</a:t>
             </a:r>
           </a:p>
           <a:p>
@@ -11829,7 +13330,17 @@
                 </a:solidFill>
                 <a:latin typeface="맑은 고딕"/>
               </a:rPr>
-              <a:t>•  FRA — `V$FLASH_RECOVERY_AREA_USAGE`</a:t>
+              <a:t>•  FRA — </a:t>
+            </a:r>
+            <a:r>
+              <a:rPr sz="1700" b="0">
+                <a:solidFill>
+                  <a:srgbClr val="222222"/>
+                </a:solidFill>
+                <a:latin typeface="Consolas"/>
+                <a:cs typeface="Consolas"/>
+              </a:rPr>
+              <a:t>V$FLASH_RECOVERY_AREA_USAGE</a:t>
             </a:r>
           </a:p>
           <a:p>
@@ -11845,7 +13356,17 @@
                 </a:solidFill>
                 <a:latin typeface="맑은 고딕"/>
               </a:rPr>
-              <a:t>•  PDB — `V$PDBS`</a:t>
+              <a:t>•  PDB — </a:t>
+            </a:r>
+            <a:r>
+              <a:rPr sz="1700" b="0">
+                <a:solidFill>
+                  <a:srgbClr val="222222"/>
+                </a:solidFill>
+                <a:latin typeface="Consolas"/>
+                <a:cs typeface="Consolas"/>
+              </a:rPr>
+              <a:t>V$PDBS</a:t>
             </a:r>
           </a:p>
         </p:txBody>
@@ -12263,7 +13784,25 @@
                 </a:solidFill>
                 <a:latin typeface="맑은 고딕"/>
               </a:rPr>
-              <a:t>•  **적합** — 실제 데이터에서만 드러나는 문제 / 짧게 / 되돌릴 것이 확실할 때</a:t>
+              <a:t>•  </a:t>
+            </a:r>
+            <a:r>
+              <a:rPr sz="1700" b="1">
+                <a:solidFill>
+                  <a:srgbClr val="222222"/>
+                </a:solidFill>
+                <a:latin typeface="맑은 고딕"/>
+              </a:rPr>
+              <a:t>적합</a:t>
+            </a:r>
+            <a:r>
+              <a:rPr sz="1700" b="0">
+                <a:solidFill>
+                  <a:srgbClr val="222222"/>
+                </a:solidFill>
+                <a:latin typeface="맑은 고딕"/>
+              </a:rPr>
+              <a:t> — 실제 데이터에서만 드러나는 문제 / 짧게 / 되돌릴 것이 확실할 때</a:t>
             </a:r>
           </a:p>
           <a:p>
@@ -12279,7 +13818,25 @@
                 </a:solidFill>
                 <a:latin typeface="맑은 고딕"/>
               </a:rPr>
-              <a:t>•  **부적합** — Standby 가 하나뿐 / 오래 / 결과를 유지 / 데이터를 많이 바꿈</a:t>
+              <a:t>•  </a:t>
+            </a:r>
+            <a:r>
+              <a:rPr sz="1700" b="1">
+                <a:solidFill>
+                  <a:srgbClr val="222222"/>
+                </a:solidFill>
+                <a:latin typeface="맑은 고딕"/>
+              </a:rPr>
+              <a:t>부적합</a:t>
+            </a:r>
+            <a:r>
+              <a:rPr sz="1700" b="0">
+                <a:solidFill>
+                  <a:srgbClr val="222222"/>
+                </a:solidFill>
+                <a:latin typeface="맑은 고딕"/>
+              </a:rPr>
+              <a:t> — Standby 가 하나뿐 / 오래 / 결과를 유지 / 데이터를 많이 바꿈</a:t>
             </a:r>
           </a:p>
           <a:p>
@@ -12295,7 +13852,25 @@
                 </a:solidFill>
                 <a:latin typeface="맑은 고딕"/>
               </a:rPr>
-              <a:t>•  긴 시험은 **나누어** 한다 — 되돌렸다 다시 전환</a:t>
+              <a:t>•  긴 시험은 </a:t>
+            </a:r>
+            <a:r>
+              <a:rPr sz="1700" b="1">
+                <a:solidFill>
+                  <a:srgbClr val="222222"/>
+                </a:solidFill>
+                <a:latin typeface="맑은 고딕"/>
+              </a:rPr>
+              <a:t>나누어</a:t>
+            </a:r>
+            <a:r>
+              <a:rPr sz="1700" b="0">
+                <a:solidFill>
+                  <a:srgbClr val="222222"/>
+                </a:solidFill>
+                <a:latin typeface="맑은 고딕"/>
+              </a:rPr>
+              <a:t> 한다 — 되돌렸다 다시 전환</a:t>
             </a:r>
           </a:p>
           <a:p>
@@ -12506,7 +14081,25 @@
                 </a:solidFill>
                 <a:latin typeface="맑은 고딕"/>
               </a:rPr>
-              <a:t>•  그런데 만난 오류 넷 중 **셋이 상태에서** 왔다</a:t>
+              <a:t>•  그런데 만난 오류 넷 중 </a:t>
+            </a:r>
+            <a:r>
+              <a:rPr sz="1700" b="1">
+                <a:solidFill>
+                  <a:srgbClr val="222222"/>
+                </a:solidFill>
+                <a:latin typeface="맑은 고딕"/>
+              </a:rPr>
+              <a:t>셋이 상태에서</a:t>
+            </a:r>
+            <a:r>
+              <a:rPr sz="1700" b="0">
+                <a:solidFill>
+                  <a:srgbClr val="222222"/>
+                </a:solidFill>
+                <a:latin typeface="맑은 고딕"/>
+              </a:rPr>
+              <a:t> 왔다</a:t>
             </a:r>
           </a:p>
           <a:p>
@@ -12538,7 +14131,25 @@
                 </a:solidFill>
                 <a:latin typeface="맑은 고딕"/>
               </a:rPr>
-              <a:t>•  대책 — 명령 전에 **상태 한 줄**을 먼저 조회한다</a:t>
+              <a:t>•  대책 — 명령 전에 </a:t>
+            </a:r>
+            <a:r>
+              <a:rPr sz="1700" b="1">
+                <a:solidFill>
+                  <a:srgbClr val="222222"/>
+                </a:solidFill>
+                <a:latin typeface="맑은 고딕"/>
+              </a:rPr>
+              <a:t>상태 한 줄</a:t>
+            </a:r>
+            <a:r>
+              <a:rPr sz="1700" b="0">
+                <a:solidFill>
+                  <a:srgbClr val="222222"/>
+                </a:solidFill>
+                <a:latin typeface="맑은 고딕"/>
+              </a:rPr>
+              <a:t>을 먼저 조회한다</a:t>
             </a:r>
           </a:p>
           <a:p>
@@ -12554,7 +14165,17 @@
                 </a:solidFill>
                 <a:latin typeface="맑은 고딕"/>
               </a:rPr>
-              <a:t>•  `select database_role, open_mode, controlfile_type, flashback_on from v$database;`</a:t>
+              <a:t>•  </a:t>
+            </a:r>
+            <a:r>
+              <a:rPr sz="1700" b="0">
+                <a:solidFill>
+                  <a:srgbClr val="222222"/>
+                </a:solidFill>
+                <a:latin typeface="Consolas"/>
+                <a:cs typeface="Consolas"/>
+              </a:rPr>
+              <a:t>select database_role, open_mode, controlfile_type, flashback_on from v$database;</a:t>
             </a:r>
           </a:p>
         </p:txBody>
@@ -12694,7 +14315,25 @@
                 </a:solidFill>
                 <a:latin typeface="맑은 고딕"/>
               </a:rPr>
-              <a:t>•  Snapshot Standby 는 Physical Standby 를 **잠시 쓰기 가능**하게 바꾼다. 되돌리면 전부 사라진다.</a:t>
+              <a:t>•  Snapshot Standby 는 Physical Standby 를 </a:t>
+            </a:r>
+            <a:r>
+              <a:rPr sz="1600" b="1">
+                <a:solidFill>
+                  <a:srgbClr val="222222"/>
+                </a:solidFill>
+                <a:latin typeface="맑은 고딕"/>
+              </a:rPr>
+              <a:t>잠시 쓰기 가능</a:t>
+            </a:r>
+            <a:r>
+              <a:rPr sz="1600" b="0">
+                <a:solidFill>
+                  <a:srgbClr val="222222"/>
+                </a:solidFill>
+                <a:latin typeface="맑은 고딕"/>
+              </a:rPr>
+              <a:t>하게 바꾼다. 되돌리면 전부 사라진다.</a:t>
             </a:r>
           </a:p>
           <a:p>
@@ -12726,7 +14365,25 @@
                 </a:solidFill>
                 <a:latin typeface="맑은 고딕"/>
               </a:rPr>
-              <a:t>•  되돌리는 원리는 **보장 복원 지점**이다. 전환할 때 자동으로 만들어진다.</a:t>
+              <a:t>•  되돌리는 원리는 </a:t>
+            </a:r>
+            <a:r>
+              <a:rPr sz="1600" b="1">
+                <a:solidFill>
+                  <a:srgbClr val="222222"/>
+                </a:solidFill>
+                <a:latin typeface="맑은 고딕"/>
+              </a:rPr>
+              <a:t>보장 복원 지점</a:t>
+            </a:r>
+            <a:r>
+              <a:rPr sz="1600" b="0">
+                <a:solidFill>
+                  <a:srgbClr val="222222"/>
+                </a:solidFill>
+                <a:latin typeface="맑은 고딕"/>
+              </a:rPr>
+              <a:t>이다. 전환할 때 자동으로 만들어진다.</a:t>
             </a:r>
           </a:p>
           <a:p>
@@ -12742,7 +14399,26 @@
                 </a:solidFill>
                 <a:latin typeface="맑은 고딕"/>
               </a:rPr>
-              <a:t>•  `FLASHBACK_ON` 이 NO 여도 전환된다. 전체 로깅이 아니라 복원 지점을 쓰기 때문이다.</a:t>
+              <a:t>•  </a:t>
+            </a:r>
+            <a:r>
+              <a:rPr sz="1600" b="0">
+                <a:solidFill>
+                  <a:srgbClr val="222222"/>
+                </a:solidFill>
+                <a:latin typeface="Consolas"/>
+                <a:cs typeface="Consolas"/>
+              </a:rPr>
+              <a:t>FLASHBACK_ON</a:t>
+            </a:r>
+            <a:r>
+              <a:rPr sz="1600" b="0">
+                <a:solidFill>
+                  <a:srgbClr val="222222"/>
+                </a:solidFill>
+                <a:latin typeface="맑은 고딕"/>
+              </a:rPr>
+              <a:t> 이 NO 여도 전환된다. 전체 로깅이 아니라 복원 지점을 쓰기 때문이다.</a:t>
             </a:r>
           </a:p>
           <a:p>
@@ -12758,7 +14434,25 @@
                 </a:solidFill>
                 <a:latin typeface="맑은 고딕"/>
               </a:rPr>
-              <a:t>•  MRP 가 돌면 전환 불가 — **ORA-38784 + ORA-01153**. 메시지에 복원 지점 이름이 드러난다.</a:t>
+              <a:t>•  MRP 가 돌면 전환 불가 — </a:t>
+            </a:r>
+            <a:r>
+              <a:rPr sz="1600" b="1">
+                <a:solidFill>
+                  <a:srgbClr val="222222"/>
+                </a:solidFill>
+                <a:latin typeface="맑은 고딕"/>
+              </a:rPr>
+              <a:t>ORA-38784 + ORA-01153</a:t>
+            </a:r>
+            <a:r>
+              <a:rPr sz="1600" b="0">
+                <a:solidFill>
+                  <a:srgbClr val="222222"/>
+                </a:solidFill>
+                <a:latin typeface="맑은 고딕"/>
+              </a:rPr>
+              <a:t>. 메시지에 복원 지점 이름이 드러난다.</a:t>
             </a:r>
           </a:p>
           <a:p>
@@ -12774,7 +14468,25 @@
                 </a:solidFill>
                 <a:latin typeface="맑은 고딕"/>
               </a:rPr>
-              <a:t>•  전환 후 — SNAPSHOT STANDBY / **MOUNTED** / CURRENT / RESTORE POINT ONLY.</a:t>
+              <a:t>•  전환 후 — SNAPSHOT STANDBY / </a:t>
+            </a:r>
+            <a:r>
+              <a:rPr sz="1600" b="1">
+                <a:solidFill>
+                  <a:srgbClr val="222222"/>
+                </a:solidFill>
+                <a:latin typeface="맑은 고딕"/>
+              </a:rPr>
+              <a:t>MOUNTED</a:t>
+            </a:r>
+            <a:r>
+              <a:rPr sz="1600" b="0">
+                <a:solidFill>
+                  <a:srgbClr val="222222"/>
+                </a:solidFill>
+                <a:latin typeface="맑은 고딕"/>
+              </a:rPr>
+              <a:t> / CURRENT / RESTORE POINT ONLY.</a:t>
             </a:r>
           </a:p>
         </p:txBody>
@@ -12914,7 +14626,25 @@
                 </a:solidFill>
                 <a:latin typeface="맑은 고딕"/>
               </a:rPr>
-              <a:t>•  보장 복원 지점은 FRA 가 부족해도 **지워지지 않는다.** 대신 데이터베이스가 멈춘다.</a:t>
+              <a:t>•  보장 복원 지점은 FRA 가 부족해도 </a:t>
+            </a:r>
+            <a:r>
+              <a:rPr sz="1600" b="1">
+                <a:solidFill>
+                  <a:srgbClr val="222222"/>
+                </a:solidFill>
+                <a:latin typeface="맑은 고딕"/>
+              </a:rPr>
+              <a:t>지워지지 않는다.</a:t>
+            </a:r>
+            <a:r>
+              <a:rPr sz="1600" b="0">
+                <a:solidFill>
+                  <a:srgbClr val="222222"/>
+                </a:solidFill>
+                <a:latin typeface="맑은 고딕"/>
+              </a:rPr>
+              <a:t> 대신 데이터베이스가 멈춘다.</a:t>
             </a:r>
           </a:p>
           <a:p>
@@ -12930,7 +14660,25 @@
                 </a:solidFill>
                 <a:latin typeface="맑은 고딕"/>
               </a:rPr>
-              <a:t>•  CDB 를 열어도 **PDB 는 MOUNTED** 로 남는다. 조회하면 ORA-01219.</a:t>
+              <a:t>•  CDB 를 열어도 </a:t>
+            </a:r>
+            <a:r>
+              <a:rPr sz="1600" b="1">
+                <a:solidFill>
+                  <a:srgbClr val="222222"/>
+                </a:solidFill>
+                <a:latin typeface="맑은 고딕"/>
+              </a:rPr>
+              <a:t>PDB 는 MOUNTED</a:t>
+            </a:r>
+            <a:r>
+              <a:rPr sz="1600" b="0">
+                <a:solidFill>
+                  <a:srgbClr val="222222"/>
+                </a:solidFill>
+                <a:latin typeface="맑은 고딕"/>
+              </a:rPr>
+              <a:t> 로 남는다. 조회하면 ORA-01219.</a:t>
             </a:r>
           </a:p>
           <a:p>
@@ -12946,7 +14694,25 @@
                 </a:solidFill>
                 <a:latin typeface="맑은 고딕"/>
               </a:rPr>
-              <a:t>•  Snapshot 에서 MRP 기동 → **ORA-01665**. Primary·Far Sync 와 같은 이유(컨트롤 파일 유형).</a:t>
+              <a:t>•  Snapshot 에서 MRP 기동 → </a:t>
+            </a:r>
+            <a:r>
+              <a:rPr sz="1600" b="1">
+                <a:solidFill>
+                  <a:srgbClr val="222222"/>
+                </a:solidFill>
+                <a:latin typeface="맑은 고딕"/>
+              </a:rPr>
+              <a:t>ORA-01665</a:t>
+            </a:r>
+            <a:r>
+              <a:rPr sz="1600" b="0">
+                <a:solidFill>
+                  <a:srgbClr val="222222"/>
+                </a:solidFill>
+                <a:latin typeface="맑은 고딕"/>
+              </a:rPr>
+              <a:t>. Primary·Far Sync 와 같은 이유(컨트롤 파일 유형).</a:t>
             </a:r>
           </a:p>
           <a:p>
@@ -12962,7 +14728,25 @@
                 </a:solidFill>
                 <a:latin typeface="맑은 고딕"/>
               </a:rPr>
-              <a:t>•  적용은 멈추고 **수신은 계속**한다. transport lag 0 / apply lag 증가.</a:t>
+              <a:t>•  적용은 멈추고 </a:t>
+            </a:r>
+            <a:r>
+              <a:rPr sz="1600" b="1">
+                <a:solidFill>
+                  <a:srgbClr val="222222"/>
+                </a:solidFill>
+                <a:latin typeface="맑은 고딕"/>
+              </a:rPr>
+              <a:t>수신은 계속</a:t>
+            </a:r>
+            <a:r>
+              <a:rPr sz="1600" b="0">
+                <a:solidFill>
+                  <a:srgbClr val="222222"/>
+                </a:solidFill>
+                <a:latin typeface="맑은 고딕"/>
+              </a:rPr>
+              <a:t>한다. transport lag 0 / apply lag 증가.</a:t>
             </a:r>
           </a:p>
           <a:p>
@@ -12978,7 +14762,44 @@
                 </a:solidFill>
                 <a:latin typeface="맑은 고딕"/>
               </a:rPr>
-              <a:t>•  FRA 에 **FLASHBACK LOG** 유형이 생긴다(1,536 → 1,941MB). 감시는 `STORAGE_SIZE` 가 아니라 이것으로.</a:t>
+              <a:t>•  FRA 에 </a:t>
+            </a:r>
+            <a:r>
+              <a:rPr sz="1600" b="1">
+                <a:solidFill>
+                  <a:srgbClr val="222222"/>
+                </a:solidFill>
+                <a:latin typeface="맑은 고딕"/>
+              </a:rPr>
+              <a:t>FLASHBACK LOG</a:t>
+            </a:r>
+            <a:r>
+              <a:rPr sz="1600" b="0">
+                <a:solidFill>
+                  <a:srgbClr val="222222"/>
+                </a:solidFill>
+                <a:latin typeface="맑은 고딕"/>
+              </a:rPr>
+              <a:t> 유형이 생긴다(1,536 → 1,941MB). 감시는 </a:t>
+            </a:r>
+            <a:r>
+              <a:rPr sz="1600" b="0">
+                <a:solidFill>
+                  <a:srgbClr val="222222"/>
+                </a:solidFill>
+                <a:latin typeface="Consolas"/>
+                <a:cs typeface="Consolas"/>
+              </a:rPr>
+              <a:t>STORAGE_SIZE</a:t>
+            </a:r>
+            <a:r>
+              <a:rPr sz="1600" b="0">
+                <a:solidFill>
+                  <a:srgbClr val="222222"/>
+                </a:solidFill>
+                <a:latin typeface="맑은 고딕"/>
+              </a:rPr>
+              <a:t> 가 아니라 이것으로.</a:t>
             </a:r>
           </a:p>
           <a:p>
@@ -12994,7 +14815,61 @@
                 </a:solidFill>
                 <a:latin typeface="맑은 고딕"/>
               </a:rPr>
-              <a:t>•  복귀는 **MOUNT 에서**. 이후 **열고 나서 MRP** — 반대면 **ORA-10456**.</a:t>
+              <a:t>•  복귀는 </a:t>
+            </a:r>
+            <a:r>
+              <a:rPr sz="1600" b="1">
+                <a:solidFill>
+                  <a:srgbClr val="222222"/>
+                </a:solidFill>
+                <a:latin typeface="맑은 고딕"/>
+              </a:rPr>
+              <a:t>MOUNT 에서</a:t>
+            </a:r>
+            <a:r>
+              <a:rPr sz="1600" b="0">
+                <a:solidFill>
+                  <a:srgbClr val="222222"/>
+                </a:solidFill>
+                <a:latin typeface="맑은 고딕"/>
+              </a:rPr>
+              <a:t>. 이후 </a:t>
+            </a:r>
+            <a:r>
+              <a:rPr sz="1600" b="1">
+                <a:solidFill>
+                  <a:srgbClr val="222222"/>
+                </a:solidFill>
+                <a:latin typeface="맑은 고딕"/>
+              </a:rPr>
+              <a:t>열고 나서 MRP</a:t>
+            </a:r>
+            <a:r>
+              <a:rPr sz="1600" b="0">
+                <a:solidFill>
+                  <a:srgbClr val="222222"/>
+                </a:solidFill>
+                <a:latin typeface="맑은 고딕"/>
+              </a:rPr>
+              <a:t> — 반대면 </a:t>
+            </a:r>
+            <a:r>
+              <a:rPr sz="1600" b="1">
+                <a:solidFill>
+                  <a:srgbClr val="222222"/>
+                </a:solidFill>
+                <a:latin typeface="맑은 고딕"/>
+              </a:rPr>
+              <a:t>ORA-10456</a:t>
+            </a:r>
+            <a:r>
+              <a:rPr sz="1600" b="0">
+                <a:solidFill>
+                  <a:srgbClr val="222222"/>
+                </a:solidFill>
+                <a:latin typeface="맑은 고딕"/>
+              </a:rPr>
+              <a:t>.</a:t>
             </a:r>
           </a:p>
           <a:p>
@@ -13010,7 +14885,25 @@
                 </a:solidFill>
                 <a:latin typeface="맑은 고딕"/>
               </a:rPr>
-              <a:t>•  검증 — 쓴 테이블은 **ORA-00942**, 고친 행은 복귀, 밀린 리두는 적용, FRA 400MB 회수.</a:t>
+              <a:t>•  검증 — 쓴 테이블은 </a:t>
+            </a:r>
+            <a:r>
+              <a:rPr sz="1600" b="1">
+                <a:solidFill>
+                  <a:srgbClr val="222222"/>
+                </a:solidFill>
+                <a:latin typeface="맑은 고딕"/>
+              </a:rPr>
+              <a:t>ORA-00942</a:t>
+            </a:r>
+            <a:r>
+              <a:rPr sz="1600" b="0">
+                <a:solidFill>
+                  <a:srgbClr val="222222"/>
+                </a:solidFill>
+                <a:latin typeface="맑은 고딕"/>
+              </a:rPr>
+              <a:t>, 고친 행은 복귀, 밀린 리두는 적용, FRA 400MB 회수.</a:t>
             </a:r>
           </a:p>
         </p:txBody>
@@ -13955,7 +15848,70 @@
                 </a:solidFill>
                 <a:latin typeface="맑은 고딕"/>
               </a:rPr>
-              <a:t>•  **Snapshot Standby** — **명령 한 줄**, **기존 Standby 재사용**, **전환 직전까지**</a:t>
+              <a:t>•  </a:t>
+            </a:r>
+            <a:r>
+              <a:rPr sz="1700" b="1">
+                <a:solidFill>
+                  <a:srgbClr val="222222"/>
+                </a:solidFill>
+                <a:latin typeface="맑은 고딕"/>
+              </a:rPr>
+              <a:t>Snapshot Standby</a:t>
+            </a:r>
+            <a:r>
+              <a:rPr sz="1700" b="0">
+                <a:solidFill>
+                  <a:srgbClr val="222222"/>
+                </a:solidFill>
+                <a:latin typeface="맑은 고딕"/>
+              </a:rPr>
+              <a:t> — </a:t>
+            </a:r>
+            <a:r>
+              <a:rPr sz="1700" b="1">
+                <a:solidFill>
+                  <a:srgbClr val="222222"/>
+                </a:solidFill>
+                <a:latin typeface="맑은 고딕"/>
+              </a:rPr>
+              <a:t>명령 한 줄</a:t>
+            </a:r>
+            <a:r>
+              <a:rPr sz="1700" b="0">
+                <a:solidFill>
+                  <a:srgbClr val="222222"/>
+                </a:solidFill>
+                <a:latin typeface="맑은 고딕"/>
+              </a:rPr>
+              <a:t>, </a:t>
+            </a:r>
+            <a:r>
+              <a:rPr sz="1700" b="1">
+                <a:solidFill>
+                  <a:srgbClr val="222222"/>
+                </a:solidFill>
+                <a:latin typeface="맑은 고딕"/>
+              </a:rPr>
+              <a:t>기존 Standby 재사용</a:t>
+            </a:r>
+            <a:r>
+              <a:rPr sz="1700" b="0">
+                <a:solidFill>
+                  <a:srgbClr val="222222"/>
+                </a:solidFill>
+                <a:latin typeface="맑은 고딕"/>
+              </a:rPr>
+              <a:t>, </a:t>
+            </a:r>
+            <a:r>
+              <a:rPr sz="1700" b="1">
+                <a:solidFill>
+                  <a:srgbClr val="222222"/>
+                </a:solidFill>
+                <a:latin typeface="맑은 고딕"/>
+              </a:rPr>
+              <a:t>전환 직전까지</a:t>
             </a:r>
           </a:p>
           <a:p>
@@ -13971,7 +15927,16 @@
                 </a:solidFill>
                 <a:latin typeface="맑은 고딕"/>
               </a:rPr>
-              <a:t>•  ADG (Physical Standby) — 실시간이지만 **조회만**</a:t>
+              <a:t>•  ADG (Physical Standby) — 실시간이지만 </a:t>
+            </a:r>
+            <a:r>
+              <a:rPr sz="1700" b="1">
+                <a:solidFill>
+                  <a:srgbClr val="222222"/>
+                </a:solidFill>
+                <a:latin typeface="맑은 고딕"/>
+              </a:rPr>
+              <a:t>조회만</a:t>
             </a:r>
           </a:p>
         </p:txBody>
@@ -14150,7 +16115,25 @@
                 </a:solidFill>
                 <a:latin typeface="맑은 고딕"/>
               </a:rPr>
-              <a:t>•  **① 재해 복구 능력이 잠시 사라진다** — 적용이 멈춘다</a:t>
+              <a:t>•  </a:t>
+            </a:r>
+            <a:r>
+              <a:rPr sz="1700" b="1">
+                <a:solidFill>
+                  <a:srgbClr val="222222"/>
+                </a:solidFill>
+                <a:latin typeface="맑은 고딕"/>
+              </a:rPr>
+              <a:t>① 재해 복구 능력이 잠시 사라진다</a:t>
+            </a:r>
+            <a:r>
+              <a:rPr sz="1700" b="0">
+                <a:solidFill>
+                  <a:srgbClr val="222222"/>
+                </a:solidFill>
+                <a:latin typeface="맑은 고딕"/>
+              </a:rPr>
+              <a:t> — 적용이 멈춘다</a:t>
             </a:r>
           </a:p>
           <a:p>
@@ -14166,7 +16149,25 @@
                 </a:solidFill>
                 <a:latin typeface="맑은 고딕"/>
               </a:rPr>
-              <a:t>•  **② FRA 를 쓴다** — 플래시백 로그. 실습에서 405MB</a:t>
+              <a:t>•  </a:t>
+            </a:r>
+            <a:r>
+              <a:rPr sz="1700" b="1">
+                <a:solidFill>
+                  <a:srgbClr val="222222"/>
+                </a:solidFill>
+                <a:latin typeface="맑은 고딕"/>
+              </a:rPr>
+              <a:t>② FRA 를 쓴다</a:t>
+            </a:r>
+            <a:r>
+              <a:rPr sz="1700" b="0">
+                <a:solidFill>
+                  <a:srgbClr val="222222"/>
+                </a:solidFill>
+                <a:latin typeface="맑은 고딕"/>
+              </a:rPr>
+              <a:t> — 플래시백 로그. 실습에서 405MB</a:t>
             </a:r>
           </a:p>
           <a:p>
@@ -14182,7 +16183,25 @@
                 </a:solidFill>
                 <a:latin typeface="맑은 고딕"/>
               </a:rPr>
-              <a:t>•  **③ 되돌리면 전부 사라진다** — 남길 것은 미리 빼낸다</a:t>
+              <a:t>•  </a:t>
+            </a:r>
+            <a:r>
+              <a:rPr sz="1700" b="1">
+                <a:solidFill>
+                  <a:srgbClr val="222222"/>
+                </a:solidFill>
+                <a:latin typeface="맑은 고딕"/>
+              </a:rPr>
+              <a:t>③ 되돌리면 전부 사라진다</a:t>
+            </a:r>
+            <a:r>
+              <a:rPr sz="1700" b="0">
+                <a:solidFill>
+                  <a:srgbClr val="222222"/>
+                </a:solidFill>
+                <a:latin typeface="맑은 고딕"/>
+              </a:rPr>
+              <a:t> — 남길 것은 미리 빼낸다</a:t>
             </a:r>
           </a:p>
           <a:p>
@@ -14198,7 +16217,25 @@
                 </a:solidFill>
                 <a:latin typeface="맑은 고딕"/>
               </a:rPr>
-              <a:t>•  라이선스 — ADG 옵션은 **필요 없다**. EE 의 Data Guard 범위</a:t>
+              <a:t>•  라이선스 — ADG 옵션은 </a:t>
+            </a:r>
+            <a:r>
+              <a:rPr sz="1700" b="1">
+                <a:solidFill>
+                  <a:srgbClr val="222222"/>
+                </a:solidFill>
+                <a:latin typeface="맑은 고딕"/>
+              </a:rPr>
+              <a:t>필요 없다</a:t>
+            </a:r>
+            <a:r>
+              <a:rPr sz="1700" b="0">
+                <a:solidFill>
+                  <a:srgbClr val="222222"/>
+                </a:solidFill>
+                <a:latin typeface="맑은 고딕"/>
+              </a:rPr>
+              <a:t>. EE 의 Data Guard 범위</a:t>
             </a:r>
           </a:p>
         </p:txBody>
@@ -14648,7 +16685,16 @@
                 </a:solidFill>
                 <a:latin typeface="맑은 고딕"/>
               </a:rPr>
-              <a:t>•  boston — PHYSICAL STANDBY / **READ ONLY WITH APPLY**</a:t>
+              <a:t>•  boston — PHYSICAL STANDBY / </a:t>
+            </a:r>
+            <a:r>
+              <a:rPr sz="1700" b="1">
+                <a:solidFill>
+                  <a:srgbClr val="222222"/>
+                </a:solidFill>
+                <a:latin typeface="맑은 고딕"/>
+              </a:rPr>
+              <a:t>READ ONLY WITH APPLY</a:t>
             </a:r>
           </a:p>
           <a:p>
@@ -14664,7 +16710,26 @@
                 </a:solidFill>
                 <a:latin typeface="맑은 고딕"/>
               </a:rPr>
-              <a:t>•  `RECOVERY_MODE` — MANAGED REAL TIME APPLY</a:t>
+              <a:t>•  </a:t>
+            </a:r>
+            <a:r>
+              <a:rPr sz="1700" b="0">
+                <a:solidFill>
+                  <a:srgbClr val="222222"/>
+                </a:solidFill>
+                <a:latin typeface="Consolas"/>
+                <a:cs typeface="Consolas"/>
+              </a:rPr>
+              <a:t>RECOVERY_MODE</a:t>
+            </a:r>
+            <a:r>
+              <a:rPr sz="1700" b="0">
+                <a:solidFill>
+                  <a:srgbClr val="222222"/>
+                </a:solidFill>
+                <a:latin typeface="맑은 고딕"/>
+              </a:rPr>
+              <a:t> — MANAGED REAL TIME APPLY</a:t>
             </a:r>
           </a:p>
           <a:p>
@@ -14696,7 +16761,25 @@
                 </a:solidFill>
                 <a:latin typeface="맑은 고딕"/>
               </a:rPr>
-              <a:t>•  Far Sync 는 내려가 있다. 이 장은 **2노드만** 쓴다</a:t>
+              <a:t>•  Far Sync 는 내려가 있다. 이 장은 </a:t>
+            </a:r>
+            <a:r>
+              <a:rPr sz="1700" b="1">
+                <a:solidFill>
+                  <a:srgbClr val="222222"/>
+                </a:solidFill>
+                <a:latin typeface="맑은 고딕"/>
+              </a:rPr>
+              <a:t>2노드만</a:t>
+            </a:r>
+            <a:r>
+              <a:rPr sz="1700" b="0">
+                <a:solidFill>
+                  <a:srgbClr val="222222"/>
+                </a:solidFill>
+                <a:latin typeface="맑은 고딕"/>
+              </a:rPr>
+              <a:t> 쓴다</a:t>
             </a:r>
           </a:p>
         </p:txBody>
